--- a/Updated_Security_Servers_Project.pptx
+++ b/Updated_Security_Servers_Project.pptx
@@ -4,17 +4,16 @@
   <p:sldMasterIdLst>
     <p:sldMasterId id="2147483648" r:id="rId1"/>
   </p:sldMasterIdLst>
+  <p:notesMasterIdLst>
+    <p:notesMasterId r:id="rId7"/>
+  </p:notesMasterIdLst>
   <p:sldIdLst>
     <p:sldId id="256" r:id="rId2"/>
     <p:sldId id="257" r:id="rId3"/>
     <p:sldId id="258" r:id="rId4"/>
     <p:sldId id="259" r:id="rId5"/>
     <p:sldId id="260" r:id="rId6"/>
-    <p:sldId id="261" r:id="rId7"/>
   </p:sldIdLst>
-  <p:notesMasterIdLst>
-    <p:notesMasterId r:id="rId8"/>
-  </p:notesMasterIdLst>
   <p:sldSz cx="12192000" cy="6858000"/>
   <p:notesSz cx="6858000" cy="12192000"/>
   <p:defaultTextStyle>
@@ -109,6 +108,11 @@
       </a:defRPr>
     </a:lvl9pPr>
   </p:defaultTextStyle>
+  <p:extLst>
+    <p:ext uri="{EFAFB233-063F-42B5-8137-9DF3F51BA10A}">
+      <p15:sldGuideLst xmlns:p15="http://schemas.microsoft.com/office/powerpoint/2012/main"/>
+    </p:ext>
+  </p:extLst>
 </p:presentation>
 </file>
 
@@ -134,234 +138,10 @@
           <a:chExt cx="0" cy="0"/>
         </a:xfrm>
       </p:grpSpPr>
-      <p:sp>
-        <p:nvSpPr>
-          <p:cNvPr id="2" name="Header Placeholder 1"/>
-          <p:cNvSpPr>
-            <a:spLocks noGrp="1"/>
-          </p:cNvSpPr>
-          <p:nvPr>
-            <p:ph type="hdr" sz="quarter"/>
-          </p:nvPr>
-        </p:nvSpPr>
-        <p:spPr>
-          <a:xfrm>
-            <a:off x="0" y="0"/>
-            <a:ext cx="2971800" cy="458788"/>
-          </a:xfrm>
-          <a:prstGeom prst="rect">
-            <a:avLst/>
-          </a:prstGeom>
-        </p:spPr>
-        <p:txBody>
-          <a:bodyPr vert="horz" lIns="91440" tIns="45720" rIns="91440" bIns="45720" rtlCol="0"/>
-          <a:lstStyle>
-            <a:lvl1pPr algn="l">
-              <a:defRPr sz="1200"/>
-            </a:lvl1pPr>
-          </a:lstStyle>
-          <a:p>
-            <a:endParaRPr lang="en-US"/>
-          </a:p>
-        </p:txBody>
-      </p:sp>
-      <p:sp>
-        <p:nvSpPr>
-          <p:cNvPr id="3" name="Date Placeholder 2"/>
-          <p:cNvSpPr>
-            <a:spLocks noGrp="1"/>
-          </p:cNvSpPr>
-          <p:nvPr>
-            <p:ph type="dt" idx="1"/>
-          </p:nvPr>
-        </p:nvSpPr>
-        <p:spPr>
-          <a:xfrm>
-            <a:off x="3884613" y="0"/>
-            <a:ext cx="2971800" cy="458788"/>
-          </a:xfrm>
-          <a:prstGeom prst="rect">
-            <a:avLst/>
-          </a:prstGeom>
-        </p:spPr>
-        <p:txBody>
-          <a:bodyPr vert="horz" lIns="91440" tIns="45720" rIns="91440" bIns="45720" rtlCol="0"/>
-          <a:lstStyle>
-            <a:lvl1pPr algn="r">
-              <a:defRPr sz="1200"/>
-            </a:lvl1pPr>
-          </a:lstStyle>
-          <a:p>
-            <a:fld id="{5282F153-3F37-0F45-9E97-73ACFA13230C}" type="datetimeFigureOut">
-              <a:rPr lang="en-US"/>
-              <a:t>7/23/19</a:t>
-            </a:fld>
-            <a:endParaRPr lang="en-US"/>
-          </a:p>
-        </p:txBody>
-      </p:sp>
-      <p:sp>
-        <p:nvSpPr>
-          <p:cNvPr id="4" name="Slide Image Placeholder 3"/>
-          <p:cNvSpPr>
-            <a:spLocks noGrp="1" noRot="1" noChangeAspect="1"/>
-          </p:cNvSpPr>
-          <p:nvPr>
-            <p:ph type="sldImg" idx="2"/>
-          </p:nvPr>
-        </p:nvSpPr>
-        <p:spPr>
-          <a:xfrm>
-            <a:off x="685800" y="1143000"/>
-            <a:ext cx="5486400" cy="3086100"/>
-          </a:xfrm>
-          <a:prstGeom prst="rect">
-            <a:avLst/>
-          </a:prstGeom>
-          <a:noFill/>
-          <a:ln w="12700">
-            <a:solidFill>
-              <a:prstClr val="black"/>
-            </a:solidFill>
-          </a:ln>
-        </p:spPr>
-        <p:txBody>
-          <a:bodyPr vert="horz" lIns="91440" tIns="45720" rIns="91440" bIns="45720" rtlCol="0" anchor="ctr"/>
-          <a:lstStyle/>
-          <a:p>
-            <a:endParaRPr lang="en-US"/>
-          </a:p>
-        </p:txBody>
-      </p:sp>
-      <p:sp>
-        <p:nvSpPr>
-          <p:cNvPr id="5" name="Notes Placeholder 4"/>
-          <p:cNvSpPr>
-            <a:spLocks noGrp="1"/>
-          </p:cNvSpPr>
-          <p:nvPr>
-            <p:ph type="body" sz="quarter" idx="3"/>
-          </p:nvPr>
-        </p:nvSpPr>
-        <p:spPr>
-          <a:xfrm>
-            <a:off x="685800" y="4400550"/>
-            <a:ext cx="5486400" cy="3600450"/>
-          </a:xfrm>
-          <a:prstGeom prst="rect">
-            <a:avLst/>
-          </a:prstGeom>
-        </p:spPr>
-        <p:txBody>
-          <a:bodyPr vert="horz" lIns="91440" tIns="45720" rIns="91440" bIns="45720" rtlCol="0"/>
-          <a:lstStyle/>
-          <a:p>
-            <a:pPr lvl="0"/>
-            <a:r>
-              <a:rPr lang="en-US"/>
-              <a:t>Click to edit Master text styles</a:t>
-            </a:r>
-          </a:p>
-          <a:p>
-            <a:pPr lvl="1"/>
-            <a:r>
-              <a:rPr lang="en-US"/>
-              <a:t>Second level</a:t>
-            </a:r>
-          </a:p>
-          <a:p>
-            <a:pPr lvl="2"/>
-            <a:r>
-              <a:rPr lang="en-US"/>
-              <a:t>Third level</a:t>
-            </a:r>
-          </a:p>
-          <a:p>
-            <a:pPr lvl="3"/>
-            <a:r>
-              <a:rPr lang="en-US"/>
-              <a:t>Fourth level</a:t>
-            </a:r>
-          </a:p>
-          <a:p>
-            <a:pPr lvl="4"/>
-            <a:r>
-              <a:rPr lang="en-US"/>
-              <a:t>Fifth level</a:t>
-            </a:r>
-          </a:p>
-        </p:txBody>
-      </p:sp>
-      <p:sp>
-        <p:nvSpPr>
-          <p:cNvPr id="6" name="Footer Placeholder 5"/>
-          <p:cNvSpPr>
-            <a:spLocks noGrp="1"/>
-          </p:cNvSpPr>
-          <p:nvPr>
-            <p:ph type="ftr" sz="quarter" idx="4"/>
-          </p:nvPr>
-        </p:nvSpPr>
-        <p:spPr>
-          <a:xfrm>
-            <a:off x="0" y="8685213"/>
-            <a:ext cx="2971800" cy="458787"/>
-          </a:xfrm>
-          <a:prstGeom prst="rect">
-            <a:avLst/>
-          </a:prstGeom>
-        </p:spPr>
-        <p:txBody>
-          <a:bodyPr vert="horz" lIns="91440" tIns="45720" rIns="91440" bIns="45720" rtlCol="0" anchor="b"/>
-          <a:lstStyle>
-            <a:lvl1pPr algn="l">
-              <a:defRPr sz="1200"/>
-            </a:lvl1pPr>
-          </a:lstStyle>
-          <a:p>
-            <a:endParaRPr lang="en-US"/>
-          </a:p>
-        </p:txBody>
-      </p:sp>
-      <p:sp>
-        <p:nvSpPr>
-          <p:cNvPr id="7" name="Slide Number Placeholder 6"/>
-          <p:cNvSpPr>
-            <a:spLocks noGrp="1"/>
-          </p:cNvSpPr>
-          <p:nvPr>
-            <p:ph type="sldNum" sz="quarter" idx="5"/>
-          </p:nvPr>
-        </p:nvSpPr>
-        <p:spPr>
-          <a:xfrm>
-            <a:off x="3884613" y="8685213"/>
-            <a:ext cx="2971800" cy="458787"/>
-          </a:xfrm>
-          <a:prstGeom prst="rect">
-            <a:avLst/>
-          </a:prstGeom>
-        </p:spPr>
-        <p:txBody>
-          <a:bodyPr vert="horz" lIns="91440" tIns="45720" rIns="91440" bIns="45720" rtlCol="0" anchor="b"/>
-          <a:lstStyle>
-            <a:lvl1pPr algn="r">
-              <a:defRPr sz="1200"/>
-            </a:lvl1pPr>
-          </a:lstStyle>
-          <a:p>
-            <a:fld id="{CE5E9CC1-C706-0F49-92D6-E571CC5EEA8F}" type="slidenum">
-              <a:rPr lang="en-US"/>
-              <a:t>‹#›</a:t>
-            </a:fld>
-            <a:endParaRPr lang="en-US"/>
-          </a:p>
-        </p:txBody>
-      </p:sp>
     </p:spTree>
     <p:extLst>
       <p:ext uri="{BB962C8B-B14F-4D97-AF65-F5344CB8AC3E}">
-        <p14:creationId xmlns:p14="http://schemas.microsoft.com/office/powerpoint/2010/main" val="1024086991"/>
+        <p14:creationId xmlns:p14="http://schemas.microsoft.com/office/powerpoint/2010/main" val="2666097611"/>
       </p:ext>
     </p:extLst>
   </p:cSld>
@@ -505,10 +285,6 @@
           <a:bodyPr/>
           <a:lstStyle/>
           <a:p>
-            <a:r>
-              <a:rPr lang="en-US" dirty="0"/>
-              <a:t/>
-            </a:r>
             <a:endParaRPr lang="en-US" dirty="0"/>
           </a:p>
         </p:txBody>
@@ -593,10 +369,6 @@
           <a:bodyPr/>
           <a:lstStyle/>
           <a:p>
-            <a:r>
-              <a:rPr lang="en-US" dirty="0"/>
-              <a:t/>
-            </a:r>
             <a:endParaRPr lang="en-US" dirty="0"/>
           </a:p>
         </p:txBody>
@@ -681,10 +453,6 @@
           <a:bodyPr/>
           <a:lstStyle/>
           <a:p>
-            <a:r>
-              <a:rPr lang="en-US" dirty="0"/>
-              <a:t/>
-            </a:r>
             <a:endParaRPr lang="en-US" dirty="0"/>
           </a:p>
         </p:txBody>
@@ -769,10 +537,6 @@
           <a:bodyPr/>
           <a:lstStyle/>
           <a:p>
-            <a:r>
-              <a:rPr lang="en-US" dirty="0"/>
-              <a:t/>
-            </a:r>
             <a:endParaRPr lang="en-US" dirty="0"/>
           </a:p>
         </p:txBody>
@@ -857,10 +621,6 @@
           <a:bodyPr/>
           <a:lstStyle/>
           <a:p>
-            <a:r>
-              <a:rPr lang="en-US" dirty="0"/>
-              <a:t/>
-            </a:r>
             <a:endParaRPr lang="en-US" dirty="0"/>
           </a:p>
         </p:txBody>
@@ -883,94 +643,6 @@
             <a:fld id="{F7021451-1387-4CA6-816F-3879F97B5CBC}" type="slidenum">
               <a:rPr lang="en-US"/>
               <a:t>5</a:t>
-            </a:fld>
-            <a:endParaRPr lang="en-US"/>
-          </a:p>
-        </p:txBody>
-      </p:sp>
-    </p:spTree>
-    <p:extLst>
-      <p:ext uri="{BB962C8B-B14F-4D97-AF65-F5344CB8AC3E}">
-        <p14:creationId xmlns:p14="http://schemas.microsoft.com/office/powerpoint/2010/main" val="1024086991"/>
-      </p:ext>
-    </p:extLst>
-  </p:cSld>
-  <p:clrMapOvr>
-    <a:masterClrMapping/>
-  </p:clrMapOvr>
-</p:notes>
-</file>
-
-<file path=ppt/notesSlides/notesSlide6.xml><?xml version="1.0" encoding="utf-8"?>
-<p:notes xmlns:a="http://schemas.openxmlformats.org/drawingml/2006/main" xmlns:r="http://schemas.openxmlformats.org/officeDocument/2006/relationships" xmlns:p="http://schemas.openxmlformats.org/presentationml/2006/main">
-  <p:cSld>
-    <p:spTree>
-      <p:nvGrpSpPr>
-        <p:cNvPr id="1" name=""/>
-        <p:cNvGrpSpPr/>
-        <p:nvPr/>
-      </p:nvGrpSpPr>
-      <p:grpSpPr>
-        <a:xfrm>
-          <a:off x="0" y="0"/>
-          <a:ext cx="0" cy="0"/>
-          <a:chOff x="0" y="0"/>
-          <a:chExt cx="0" cy="0"/>
-        </a:xfrm>
-      </p:grpSpPr>
-      <p:sp>
-        <p:nvSpPr>
-          <p:cNvPr id="2" name="Slide Image Placeholder 1"/>
-          <p:cNvSpPr>
-            <a:spLocks noGrp="1" noRot="1" noChangeAspect="1"/>
-          </p:cNvSpPr>
-          <p:nvPr>
-            <p:ph type="sldImg"/>
-          </p:nvPr>
-        </p:nvSpPr>
-        <p:spPr/>
-      </p:sp>
-      <p:sp>
-        <p:nvSpPr>
-          <p:cNvPr id="3" name="Notes Placeholder 2"/>
-          <p:cNvSpPr>
-            <a:spLocks noGrp="1"/>
-          </p:cNvSpPr>
-          <p:nvPr>
-            <p:ph type="body" idx="1"/>
-          </p:nvPr>
-        </p:nvSpPr>
-        <p:spPr/>
-        <p:txBody>
-          <a:bodyPr/>
-          <a:lstStyle/>
-          <a:p>
-            <a:r>
-              <a:rPr lang="en-US" dirty="0"/>
-              <a:t/>
-            </a:r>
-            <a:endParaRPr lang="en-US" dirty="0"/>
-          </a:p>
-        </p:txBody>
-      </p:sp>
-      <p:sp>
-        <p:nvSpPr>
-          <p:cNvPr id="4" name="Slide Number Placeholder 3"/>
-          <p:cNvSpPr>
-            <a:spLocks noGrp="1"/>
-          </p:cNvSpPr>
-          <p:nvPr>
-            <p:ph type="sldNum" sz="quarter" idx="10"/>
-          </p:nvPr>
-        </p:nvSpPr>
-        <p:spPr/>
-        <p:txBody>
-          <a:bodyPr/>
-          <a:lstStyle/>
-          <a:p>
-            <a:fld id="{F7021451-1387-4CA6-816F-3879F97B5CBC}" type="slidenum">
-              <a:rPr lang="en-US"/>
-              <a:t>6</a:t>
             </a:fld>
             <a:endParaRPr lang="en-US"/>
           </a:p>
@@ -1022,6 +694,11 @@
 <file path=ppt/slideMasters/slideMaster1.xml><?xml version="1.0" encoding="utf-8"?>
 <p:sldMaster xmlns:a="http://schemas.openxmlformats.org/drawingml/2006/main" xmlns:r="http://schemas.openxmlformats.org/officeDocument/2006/relationships" xmlns:p="http://schemas.openxmlformats.org/presentationml/2006/main">
   <p:cSld>
+    <p:bg>
+      <p:bgRef idx="1001">
+        <a:schemeClr val="bg1"/>
+      </p:bgRef>
+    </p:bg>
     <p:spTree>
       <p:nvGrpSpPr>
         <p:cNvPr id="1" name=""/>
@@ -1304,6 +981,7 @@
         <a:solidFill>
           <a:srgbClr val="F7F9FC"/>
         </a:solidFill>
+        <a:effectLst/>
       </p:bgPr>
     </p:bg>
     <p:spTree>
@@ -1328,7 +1006,7 @@
         </p:nvSpPr>
         <p:spPr>
           <a:xfrm>
-            <a:off x="0" y="0"/>
+            <a:off x="0" y="274320"/>
             <a:ext cx="12191695" cy="6858000"/>
           </a:xfrm>
           <a:prstGeom prst="rect">
@@ -1344,6 +1022,47 @@
             <a:prstDash val="solid"/>
           </a:ln>
         </p:spPr>
+        <p:txBody>
+          <a:bodyPr/>
+          <a:lstStyle/>
+          <a:p>
+            <a:endParaRPr lang="en-SA"/>
+          </a:p>
+        </p:txBody>
+      </p:sp>
+      <p:sp>
+        <p:nvSpPr>
+          <p:cNvPr id="7" name="Shape 5"/>
+          <p:cNvSpPr/>
+          <p:nvPr/>
+        </p:nvSpPr>
+        <p:spPr>
+          <a:xfrm>
+            <a:off x="244258" y="731520"/>
+            <a:ext cx="8235863" cy="5212080"/>
+          </a:xfrm>
+          <a:prstGeom prst="roundRect">
+            <a:avLst>
+              <a:gd name="adj" fmla="val 1455"/>
+            </a:avLst>
+          </a:prstGeom>
+          <a:solidFill>
+            <a:srgbClr val="FFFFFF"/>
+          </a:solidFill>
+          <a:ln w="12700">
+            <a:solidFill>
+              <a:srgbClr val="D6DFEA"/>
+            </a:solidFill>
+            <a:prstDash val="solid"/>
+          </a:ln>
+        </p:spPr>
+        <p:txBody>
+          <a:bodyPr/>
+          <a:lstStyle/>
+          <a:p>
+            <a:endParaRPr lang="en-SA"/>
+          </a:p>
+        </p:txBody>
       </p:sp>
       <p:sp>
         <p:nvSpPr>
@@ -1354,7 +1073,7 @@
         <p:spPr>
           <a:xfrm>
             <a:off x="548640" y="914400"/>
-            <a:ext cx="5577840" cy="1280160"/>
+            <a:ext cx="9509760" cy="1280160"/>
           </a:xfrm>
           <a:prstGeom prst="rect">
             <a:avLst/>
@@ -1366,7 +1085,7 @@
           <a:bodyPr wrap="square" rtlCol="0" anchor="ctr"/>
           <a:lstStyle/>
           <a:p>
-            <a:pPr indent="0" marL="0">
+            <a:pPr marL="0" indent="0">
               <a:buNone/>
             </a:pPr>
             <a:r>
@@ -1380,12 +1099,10 @@
               </a:rPr>
               <a:t>Security Servers</a:t>
             </a:r>
-            <a:endParaRPr lang="en-US" sz="2400" dirty="0"/>
-          </a:p>
-          <a:p>
-            <a:pPr indent="0" marL="0">
-              <a:buNone/>
-            </a:pPr>
+            <a:r>
+              <a:rPr lang="en-US" sz="2400" dirty="0"/>
+              <a:t> </a:t>
+            </a:r>
             <a:r>
               <a:rPr lang="en-US" sz="2400" b="1" dirty="0">
                 <a:solidFill>
@@ -1422,7 +1139,10 @@
           <a:bodyPr wrap="square" rtlCol="0" anchor="ctr"/>
           <a:lstStyle/>
           <a:p>
-            <a:pPr indent="0" marL="0">
+            <a:pPr marL="0" indent="0" algn="just">
+              <a:lnSpc>
+                <a:spcPct val="150000"/>
+              </a:lnSpc>
               <a:buNone/>
             </a:pPr>
             <a:r>
@@ -1434,13 +1154,38 @@
                 <a:ea typeface="Arial" pitchFamily="34" charset="-122"/>
                 <a:cs typeface="Arial" pitchFamily="34" charset="-120"/>
               </a:rPr>
-              <a:t>Updated deck showing both project phases:</a:t>
+              <a:t>project </a:t>
+            </a:r>
+            <a:r>
+              <a:rPr lang="en-US" sz="1500" dirty="0" err="1">
+                <a:solidFill>
+                  <a:srgbClr val="1E293B"/>
+                </a:solidFill>
+                <a:latin typeface="Arial" pitchFamily="34" charset="0"/>
+                <a:ea typeface="Arial" pitchFamily="34" charset="-122"/>
+                <a:cs typeface="Arial" pitchFamily="34" charset="-120"/>
+              </a:rPr>
+              <a:t>requirment</a:t>
+            </a:r>
+            <a:r>
+              <a:rPr lang="en-US" sz="1500" dirty="0">
+                <a:solidFill>
+                  <a:srgbClr val="1E293B"/>
+                </a:solidFill>
+                <a:latin typeface="Arial" pitchFamily="34" charset="0"/>
+                <a:ea typeface="Arial" pitchFamily="34" charset="-122"/>
+                <a:cs typeface="Arial" pitchFamily="34" charset="-120"/>
+              </a:rPr>
+              <a:t>:</a:t>
             </a:r>
             <a:endParaRPr lang="en-US" sz="1500" dirty="0"/>
           </a:p>
           <a:p>
-            <a:pPr indent="0" marL="0">
-              <a:buNone/>
+            <a:pPr marL="342900" indent="-342900" algn="just">
+              <a:lnSpc>
+                <a:spcPct val="150000"/>
+              </a:lnSpc>
+              <a:buAutoNum type="arabicParenR"/>
             </a:pPr>
             <a:r>
               <a:rPr lang="en-US" sz="1500" dirty="0">
@@ -1451,13 +1196,15 @@
                 <a:ea typeface="Arial" pitchFamily="34" charset="-122"/>
                 <a:cs typeface="Arial" pitchFamily="34" charset="-120"/>
               </a:rPr>
-              <a:t>1) configuring each server in the lab</a:t>
+              <a:t>configuring each server</a:t>
             </a:r>
-            <a:endParaRPr lang="en-US" sz="1500" dirty="0"/>
-          </a:p>
-          <a:p>
-            <a:pPr indent="0" marL="0">
-              <a:buNone/>
+          </a:p>
+          <a:p>
+            <a:pPr marL="342900" indent="-342900" algn="just">
+              <a:lnSpc>
+                <a:spcPct val="150000"/>
+              </a:lnSpc>
+              <a:buAutoNum type="arabicParenR"/>
             </a:pPr>
             <a:r>
               <a:rPr lang="en-US" sz="1500" dirty="0">
@@ -1468,7 +1215,7 @@
                 <a:ea typeface="Arial" pitchFamily="34" charset="-122"/>
                 <a:cs typeface="Arial" pitchFamily="34" charset="-120"/>
               </a:rPr>
-              <a:t>2) reviewing the configuration for security issues with code and evidence</a:t>
+              <a:t>reviewing the configuration for security issues</a:t>
             </a:r>
             <a:endParaRPr lang="en-US" sz="1500" dirty="0"/>
           </a:p>
@@ -1482,8 +1229,8 @@
         </p:nvSpPr>
         <p:spPr>
           <a:xfrm>
-            <a:off x="548640" y="4023360"/>
-            <a:ext cx="2194560" cy="530352"/>
+            <a:off x="583713" y="4096512"/>
+            <a:ext cx="3022463" cy="530352"/>
           </a:xfrm>
           <a:prstGeom prst="roundRect">
             <a:avLst>
@@ -1500,6 +1247,13 @@
             <a:prstDash val="solid"/>
           </a:ln>
         </p:spPr>
+        <p:txBody>
+          <a:bodyPr/>
+          <a:lstStyle/>
+          <a:p>
+            <a:endParaRPr lang="en-SA"/>
+          </a:p>
+        </p:txBody>
       </p:sp>
       <p:sp>
         <p:nvSpPr>
@@ -1510,7 +1264,7 @@
         <p:spPr>
           <a:xfrm>
             <a:off x="768096" y="4169664"/>
-            <a:ext cx="1828800" cy="182880"/>
+            <a:ext cx="2523744" cy="384048"/>
           </a:xfrm>
           <a:prstGeom prst="rect">
             <a:avLst/>
@@ -1522,8 +1276,9 @@
           <a:bodyPr wrap="square" rtlCol="0" anchor="ctr"/>
           <a:lstStyle/>
           <a:p>
-            <a:pPr indent="0" marL="0">
-              <a:buNone/>
+            <a:pPr marL="285750" indent="-285750">
+              <a:buFont typeface="Arial" panose="020B0604020202020204" pitchFamily="34" charset="0"/>
+              <a:buChar char="•"/>
             </a:pPr>
             <a:r>
               <a:rPr lang="en-US" sz="1300" b="1" dirty="0">
@@ -1542,41 +1297,20 @@
       </p:sp>
       <p:sp>
         <p:nvSpPr>
-          <p:cNvPr id="7" name="Shape 5"/>
-          <p:cNvSpPr/>
-          <p:nvPr/>
-        </p:nvSpPr>
-        <p:spPr>
-          <a:xfrm>
-            <a:off x="6400800" y="731520"/>
-            <a:ext cx="5029200" cy="5212080"/>
-          </a:xfrm>
-          <a:prstGeom prst="roundRect">
-            <a:avLst>
-              <a:gd name="adj" fmla="val 1455"/>
-            </a:avLst>
-          </a:prstGeom>
-          <a:solidFill>
-            <a:srgbClr val="FFFFFF"/>
-          </a:solidFill>
-          <a:ln w="12700">
-            <a:solidFill>
-              <a:srgbClr val="D6DFEA"/>
-            </a:solidFill>
-            <a:prstDash val="solid"/>
-          </a:ln>
-        </p:spPr>
-      </p:sp>
-      <p:sp>
-        <p:nvSpPr>
-          <p:cNvPr id="8" name="Text 6"/>
-          <p:cNvSpPr/>
-          <p:nvPr/>
-        </p:nvSpPr>
-        <p:spPr>
-          <a:xfrm>
-            <a:off x="6720840" y="1097280"/>
-            <a:ext cx="2194560" cy="228600"/>
+          <p:cNvPr id="21" name="Text 18">
+            <a:extLst>
+              <a:ext uri="{FF2B5EF4-FFF2-40B4-BE49-F238E27FC236}">
+                <a16:creationId xmlns:a16="http://schemas.microsoft.com/office/drawing/2014/main" id="{8C43C9F8-7037-661C-18FC-3E796D1F3928}"/>
+              </a:ext>
+            </a:extLst>
+          </p:cNvPr>
+          <p:cNvSpPr/>
+          <p:nvPr/>
+        </p:nvSpPr>
+        <p:spPr>
+          <a:xfrm>
+            <a:off x="457200" y="6492240"/>
+            <a:ext cx="9601200" cy="182880"/>
           </a:xfrm>
           <a:prstGeom prst="rect">
             <a:avLst/>
@@ -1588,368 +1322,7 @@
           <a:bodyPr wrap="square" rtlCol="0" anchor="ctr"/>
           <a:lstStyle/>
           <a:p>
-            <a:pPr indent="0" marL="0">
-              <a:buNone/>
-            </a:pPr>
-            <a:r>
-              <a:rPr lang="en-US" sz="1700" b="1" dirty="0">
-                <a:solidFill>
-                  <a:srgbClr val="17324D"/>
-                </a:solidFill>
-                <a:latin typeface="Arial" pitchFamily="34" charset="0"/>
-                <a:ea typeface="Arial" pitchFamily="34" charset="-122"/>
-                <a:cs typeface="Arial" pitchFamily="34" charset="-120"/>
-              </a:rPr>
-              <a:t>Repository package</a:t>
-            </a:r>
-            <a:endParaRPr lang="en-US" sz="1700" dirty="0"/>
-          </a:p>
-        </p:txBody>
-      </p:sp>
-      <p:sp>
-        <p:nvSpPr>
-          <p:cNvPr id="9" name="Shape 7"/>
-          <p:cNvSpPr/>
-          <p:nvPr/>
-        </p:nvSpPr>
-        <p:spPr>
-          <a:xfrm>
-            <a:off x="6812280" y="1664208"/>
-            <a:ext cx="100584" cy="100584"/>
-          </a:xfrm>
-          <a:prstGeom prst="ellipse">
-            <a:avLst/>
-          </a:prstGeom>
-          <a:solidFill>
-            <a:srgbClr val="2F6DB2"/>
-          </a:solidFill>
-          <a:ln w="12700">
-            <a:solidFill>
-              <a:srgbClr val="2F6DB2"/>
-            </a:solidFill>
-            <a:prstDash val="solid"/>
-          </a:ln>
-        </p:spPr>
-      </p:sp>
-      <p:sp>
-        <p:nvSpPr>
-          <p:cNvPr id="10" name="Text 8"/>
-          <p:cNvSpPr/>
-          <p:nvPr/>
-        </p:nvSpPr>
-        <p:spPr>
-          <a:xfrm>
-            <a:off x="6995160" y="1600200"/>
-            <a:ext cx="3977640" cy="411480"/>
-          </a:xfrm>
-          <a:prstGeom prst="rect">
-            <a:avLst/>
-          </a:prstGeom>
-          <a:noFill/>
-          <a:ln/>
-        </p:spPr>
-        <p:txBody>
-          <a:bodyPr wrap="square" rtlCol="0" anchor="ctr"/>
-          <a:lstStyle/>
-          <a:p>
-            <a:pPr indent="0" marL="0">
-              <a:buNone/>
-            </a:pPr>
-            <a:r>
-              <a:rPr lang="en-US" sz="1300" dirty="0">
-                <a:solidFill>
-                  <a:srgbClr val="1E293B"/>
-                </a:solidFill>
-                <a:latin typeface="Arial" pitchFamily="34" charset="0"/>
-                <a:ea typeface="Arial" pitchFamily="34" charset="-122"/>
-                <a:cs typeface="Arial" pitchFamily="34" charset="-120"/>
-              </a:rPr>
-              <a:t>3 folders: DNS-Server, Mail-Server, Database-Server</a:t>
-            </a:r>
-            <a:endParaRPr lang="en-US" sz="1300" dirty="0"/>
-          </a:p>
-        </p:txBody>
-      </p:sp>
-      <p:sp>
-        <p:nvSpPr>
-          <p:cNvPr id="11" name="Shape 9"/>
-          <p:cNvSpPr/>
-          <p:nvPr/>
-        </p:nvSpPr>
-        <p:spPr>
-          <a:xfrm>
-            <a:off x="6812280" y="2468880"/>
-            <a:ext cx="100584" cy="100584"/>
-          </a:xfrm>
-          <a:prstGeom prst="ellipse">
-            <a:avLst/>
-          </a:prstGeom>
-          <a:solidFill>
-            <a:srgbClr val="2F6DB2"/>
-          </a:solidFill>
-          <a:ln w="12700">
-            <a:solidFill>
-              <a:srgbClr val="2F6DB2"/>
-            </a:solidFill>
-            <a:prstDash val="solid"/>
-          </a:ln>
-        </p:spPr>
-      </p:sp>
-      <p:sp>
-        <p:nvSpPr>
-          <p:cNvPr id="12" name="Text 10"/>
-          <p:cNvSpPr/>
-          <p:nvPr/>
-        </p:nvSpPr>
-        <p:spPr>
-          <a:xfrm>
-            <a:off x="6995160" y="2404872"/>
-            <a:ext cx="3977640" cy="411480"/>
-          </a:xfrm>
-          <a:prstGeom prst="rect">
-            <a:avLst/>
-          </a:prstGeom>
-          <a:noFill/>
-          <a:ln/>
-        </p:spPr>
-        <p:txBody>
-          <a:bodyPr wrap="square" rtlCol="0" anchor="ctr"/>
-          <a:lstStyle/>
-          <a:p>
-            <a:pPr indent="0" marL="0">
-              <a:buNone/>
-            </a:pPr>
-            <a:r>
-              <a:rPr lang="en-US" sz="1300" dirty="0">
-                <a:solidFill>
-                  <a:srgbClr val="1E293B"/>
-                </a:solidFill>
-                <a:latin typeface="Arial" pitchFamily="34" charset="0"/>
-                <a:ea typeface="Arial" pitchFamily="34" charset="-122"/>
-                <a:cs typeface="Arial" pitchFamily="34" charset="-120"/>
-              </a:rPr>
-              <a:t>Each folder contains a configuration file, a review file, and a PDF report</a:t>
-            </a:r>
-            <a:endParaRPr lang="en-US" sz="1300" dirty="0"/>
-          </a:p>
-        </p:txBody>
-      </p:sp>
-      <p:sp>
-        <p:nvSpPr>
-          <p:cNvPr id="13" name="Shape 11"/>
-          <p:cNvSpPr/>
-          <p:nvPr/>
-        </p:nvSpPr>
-        <p:spPr>
-          <a:xfrm>
-            <a:off x="6812280" y="3273552"/>
-            <a:ext cx="100584" cy="100584"/>
-          </a:xfrm>
-          <a:prstGeom prst="ellipse">
-            <a:avLst/>
-          </a:prstGeom>
-          <a:solidFill>
-            <a:srgbClr val="2F6DB2"/>
-          </a:solidFill>
-          <a:ln w="12700">
-            <a:solidFill>
-              <a:srgbClr val="2F6DB2"/>
-            </a:solidFill>
-            <a:prstDash val="solid"/>
-          </a:ln>
-        </p:spPr>
-      </p:sp>
-      <p:sp>
-        <p:nvSpPr>
-          <p:cNvPr id="14" name="Text 12"/>
-          <p:cNvSpPr/>
-          <p:nvPr/>
-        </p:nvSpPr>
-        <p:spPr>
-          <a:xfrm>
-            <a:off x="6995160" y="3209544"/>
-            <a:ext cx="3977640" cy="411480"/>
-          </a:xfrm>
-          <a:prstGeom prst="rect">
-            <a:avLst/>
-          </a:prstGeom>
-          <a:noFill/>
-          <a:ln/>
-        </p:spPr>
-        <p:txBody>
-          <a:bodyPr wrap="square" rtlCol="0" anchor="ctr"/>
-          <a:lstStyle/>
-          <a:p>
-            <a:pPr indent="0" marL="0">
-              <a:buNone/>
-            </a:pPr>
-            <a:r>
-              <a:rPr lang="en-US" sz="1300" dirty="0">
-                <a:solidFill>
-                  <a:srgbClr val="1E293B"/>
-                </a:solidFill>
-                <a:latin typeface="Arial" pitchFamily="34" charset="0"/>
-                <a:ea typeface="Arial" pitchFamily="34" charset="-122"/>
-                <a:cs typeface="Arial" pitchFamily="34" charset="-120"/>
-              </a:rPr>
-              <a:t>Report PDFs include screenshots showing the review evidence</a:t>
-            </a:r>
-            <a:endParaRPr lang="en-US" sz="1300" dirty="0"/>
-          </a:p>
-        </p:txBody>
-      </p:sp>
-      <p:sp>
-        <p:nvSpPr>
-          <p:cNvPr id="15" name="Shape 13"/>
-          <p:cNvSpPr/>
-          <p:nvPr/>
-        </p:nvSpPr>
-        <p:spPr>
-          <a:xfrm>
-            <a:off x="6812280" y="4078224"/>
-            <a:ext cx="100584" cy="100584"/>
-          </a:xfrm>
-          <a:prstGeom prst="ellipse">
-            <a:avLst/>
-          </a:prstGeom>
-          <a:solidFill>
-            <a:srgbClr val="2F6DB2"/>
-          </a:solidFill>
-          <a:ln w="12700">
-            <a:solidFill>
-              <a:srgbClr val="2F6DB2"/>
-            </a:solidFill>
-            <a:prstDash val="solid"/>
-          </a:ln>
-        </p:spPr>
-      </p:sp>
-      <p:sp>
-        <p:nvSpPr>
-          <p:cNvPr id="16" name="Text 14"/>
-          <p:cNvSpPr/>
-          <p:nvPr/>
-        </p:nvSpPr>
-        <p:spPr>
-          <a:xfrm>
-            <a:off x="6995160" y="4014216"/>
-            <a:ext cx="3977640" cy="411480"/>
-          </a:xfrm>
-          <a:prstGeom prst="rect">
-            <a:avLst/>
-          </a:prstGeom>
-          <a:noFill/>
-          <a:ln/>
-        </p:spPr>
-        <p:txBody>
-          <a:bodyPr wrap="square" rtlCol="0" anchor="ctr"/>
-          <a:lstStyle/>
-          <a:p>
-            <a:pPr indent="0" marL="0">
-              <a:buNone/>
-            </a:pPr>
-            <a:r>
-              <a:rPr lang="en-US" sz="1300" dirty="0">
-                <a:solidFill>
-                  <a:srgbClr val="1E293B"/>
-                </a:solidFill>
-                <a:latin typeface="Arial" pitchFamily="34" charset="0"/>
-                <a:ea typeface="Arial" pitchFamily="34" charset="-122"/>
-                <a:cs typeface="Arial" pitchFamily="34" charset="-120"/>
-              </a:rPr>
-              <a:t>Updated PowerPoint explains the full workflow clearly</a:t>
-            </a:r>
-            <a:endParaRPr lang="en-US" sz="1300" dirty="0"/>
-          </a:p>
-        </p:txBody>
-      </p:sp>
-      <p:sp>
-        <p:nvSpPr>
-          <p:cNvPr id="17" name="Shape 15"/>
-          <p:cNvSpPr/>
-          <p:nvPr/>
-        </p:nvSpPr>
-        <p:spPr>
-          <a:xfrm>
-            <a:off x="6720840" y="4709160"/>
-            <a:ext cx="4023360" cy="713232"/>
-          </a:xfrm>
-          <a:prstGeom prst="roundRect">
-            <a:avLst>
-              <a:gd name="adj" fmla="val 10256"/>
-            </a:avLst>
-          </a:prstGeom>
-          <a:solidFill>
-            <a:srgbClr val="EDF7ED"/>
-          </a:solidFill>
-          <a:ln w="12700">
-            <a:solidFill>
-              <a:srgbClr val="D9EFD9"/>
-            </a:solidFill>
-            <a:prstDash val="solid"/>
-          </a:ln>
-        </p:spPr>
-      </p:sp>
-      <p:sp>
-        <p:nvSpPr>
-          <p:cNvPr id="18" name="Text 16"/>
-          <p:cNvSpPr/>
-          <p:nvPr/>
-        </p:nvSpPr>
-        <p:spPr>
-          <a:xfrm>
-            <a:off x="6949440" y="4892040"/>
-            <a:ext cx="3611880" cy="329184"/>
-          </a:xfrm>
-          <a:prstGeom prst="rect">
-            <a:avLst/>
-          </a:prstGeom>
-          <a:noFill/>
-          <a:ln/>
-        </p:spPr>
-        <p:txBody>
-          <a:bodyPr wrap="square" rtlCol="0" anchor="ctr"/>
-          <a:lstStyle/>
-          <a:p>
-            <a:pPr algn="ctr" indent="0" marL="0">
-              <a:buNone/>
-            </a:pPr>
-            <a:r>
-              <a:rPr lang="en-US" sz="1150" b="1" dirty="0">
-                <a:solidFill>
-                  <a:srgbClr val="2F4F2F"/>
-                </a:solidFill>
-                <a:latin typeface="Arial" pitchFamily="34" charset="0"/>
-                <a:ea typeface="Arial" pitchFamily="34" charset="-122"/>
-                <a:cs typeface="Arial" pitchFamily="34" charset="-120"/>
-              </a:rPr>
-              <a:t>Goal: show that the project did not stop at setup — it also evaluated the security quality of the setup.</a:t>
-            </a:r>
-            <a:endParaRPr lang="en-US" sz="1150" dirty="0"/>
-          </a:p>
-        </p:txBody>
-      </p:sp>
-      <p:sp>
-        <p:nvSpPr>
-          <p:cNvPr id="19" name="Text 17"/>
-          <p:cNvSpPr/>
-          <p:nvPr/>
-        </p:nvSpPr>
-        <p:spPr>
-          <a:xfrm>
-            <a:off x="457200" y="6492240"/>
-            <a:ext cx="9601200" cy="182880"/>
-          </a:xfrm>
-          <a:prstGeom prst="rect">
-            <a:avLst/>
-          </a:prstGeom>
-          <a:noFill/>
-          <a:ln/>
-        </p:spPr>
-        <p:txBody>
-          <a:bodyPr wrap="square" rtlCol="0" anchor="ctr"/>
-          <a:lstStyle/>
-          <a:p>
-            <a:pPr indent="0" marL="0">
+            <a:pPr marL="0" indent="0">
               <a:buNone/>
             </a:pPr>
             <a:r>
@@ -1958,10 +1331,9 @@
                   <a:srgbClr val="6B7280"/>
                 </a:solidFill>
                 <a:latin typeface="Arial" pitchFamily="34" charset="0"/>
-                <a:ea typeface="Arial" pitchFamily="34" charset="-122"/>
                 <a:cs typeface="Arial" pitchFamily="34" charset="-120"/>
               </a:rPr>
-              <a:t>Academic project package: configuration + security review evidence</a:t>
+              <a:t>WT255</a:t>
             </a:r>
             <a:endParaRPr lang="en-US" sz="900" dirty="0"/>
           </a:p>
@@ -2000,7 +1372,7 @@
         </p:nvSpPr>
         <p:spPr>
           <a:xfrm>
-            <a:off x="0" y="0"/>
+            <a:off x="0" y="320040"/>
             <a:ext cx="12191695" cy="6858000"/>
           </a:xfrm>
           <a:prstGeom prst="rect">
@@ -2016,6 +1388,13 @@
             <a:prstDash val="solid"/>
           </a:ln>
         </p:spPr>
+        <p:txBody>
+          <a:bodyPr/>
+          <a:lstStyle/>
+          <a:p>
+            <a:endParaRPr lang="en-SA"/>
+          </a:p>
+        </p:txBody>
       </p:sp>
       <p:sp>
         <p:nvSpPr>
@@ -2038,7 +1417,7 @@
           <a:bodyPr wrap="square" rtlCol="0" anchor="ctr"/>
           <a:lstStyle/>
           <a:p>
-            <a:pPr indent="0" marL="0">
+            <a:pPr marL="0" indent="0">
               <a:buNone/>
             </a:pPr>
             <a:r>
@@ -2077,7 +1456,7 @@
           <a:bodyPr wrap="square" rtlCol="0" anchor="ctr"/>
           <a:lstStyle/>
           <a:p>
-            <a:pPr indent="0" marL="0">
+            <a:pPr marL="0" indent="0">
               <a:buNone/>
             </a:pPr>
             <a:r>
@@ -2089,7 +1468,7 @@
                 <a:ea typeface="Arial" pitchFamily="34" charset="-122"/>
                 <a:cs typeface="Arial" pitchFamily="34" charset="-120"/>
               </a:rPr>
-              <a:t>How the updated package is organized for GitHub and for presentation</a:t>
+              <a:t>Project process and structure</a:t>
             </a:r>
             <a:endParaRPr lang="en-US" sz="1050" dirty="0"/>
           </a:p>
@@ -2117,6 +1496,13 @@
             <a:prstDash val="solid"/>
           </a:ln>
         </p:spPr>
+        <p:txBody>
+          <a:bodyPr/>
+          <a:lstStyle/>
+          <a:p>
+            <a:endParaRPr lang="en-SA"/>
+          </a:p>
+        </p:txBody>
       </p:sp>
       <p:sp>
         <p:nvSpPr>
@@ -2144,6 +1530,13 @@
             <a:prstDash val="solid"/>
           </a:ln>
         </p:spPr>
+        <p:txBody>
+          <a:bodyPr/>
+          <a:lstStyle/>
+          <a:p>
+            <a:endParaRPr lang="en-SA"/>
+          </a:p>
+        </p:txBody>
       </p:sp>
       <p:sp>
         <p:nvSpPr>
@@ -2171,6 +1564,13 @@
             <a:prstDash val="solid"/>
           </a:ln>
         </p:spPr>
+        <p:txBody>
+          <a:bodyPr/>
+          <a:lstStyle/>
+          <a:p>
+            <a:endParaRPr lang="en-SA"/>
+          </a:p>
+        </p:txBody>
       </p:sp>
       <p:sp>
         <p:nvSpPr>
@@ -2193,7 +1593,7 @@
           <a:bodyPr wrap="square" rtlCol="0" anchor="ctr"/>
           <a:lstStyle/>
           <a:p>
-            <a:pPr algn="ctr" indent="0" marL="0">
+            <a:pPr marL="0" indent="0" algn="ctr">
               <a:buNone/>
             </a:pPr>
             <a:r>
@@ -2210,7 +1610,7 @@
             <a:endParaRPr lang="en-US" sz="1700" dirty="0"/>
           </a:p>
           <a:p>
-            <a:pPr algn="ctr" indent="0" marL="0">
+            <a:pPr marL="0" indent="0" algn="ctr">
               <a:buNone/>
             </a:pPr>
             <a:r>
@@ -2249,7 +1649,7 @@
           <a:bodyPr wrap="square" rtlCol="0" anchor="ctr"/>
           <a:lstStyle/>
           <a:p>
-            <a:pPr algn="l" indent="0" marL="0">
+            <a:pPr marL="0" indent="0" algn="l">
               <a:buNone/>
             </a:pPr>
             <a:r>
@@ -2293,6 +1693,13 @@
             <a:prstDash val="solid"/>
           </a:ln>
         </p:spPr>
+        <p:txBody>
+          <a:bodyPr/>
+          <a:lstStyle/>
+          <a:p>
+            <a:endParaRPr lang="en-SA"/>
+          </a:p>
+        </p:txBody>
       </p:sp>
       <p:sp>
         <p:nvSpPr>
@@ -2320,6 +1727,13 @@
             <a:prstDash val="solid"/>
           </a:ln>
         </p:spPr>
+        <p:txBody>
+          <a:bodyPr/>
+          <a:lstStyle/>
+          <a:p>
+            <a:endParaRPr lang="en-SA"/>
+          </a:p>
+        </p:txBody>
       </p:sp>
       <p:sp>
         <p:nvSpPr>
@@ -2342,7 +1756,7 @@
           <a:bodyPr wrap="square" rtlCol="0" anchor="ctr"/>
           <a:lstStyle/>
           <a:p>
-            <a:pPr algn="ctr" indent="0" marL="0">
+            <a:pPr marL="0" indent="0" algn="ctr">
               <a:buNone/>
             </a:pPr>
             <a:r>
@@ -2359,7 +1773,7 @@
             <a:endParaRPr lang="en-US" sz="1700" dirty="0"/>
           </a:p>
           <a:p>
-            <a:pPr algn="ctr" indent="0" marL="0">
+            <a:pPr marL="0" indent="0" algn="ctr">
               <a:buNone/>
             </a:pPr>
             <a:r>
@@ -2398,7 +1812,7 @@
           <a:bodyPr wrap="square" rtlCol="0" anchor="ctr"/>
           <a:lstStyle/>
           <a:p>
-            <a:pPr algn="l" indent="0" marL="0">
+            <a:pPr marL="0" indent="0" algn="l">
               <a:buNone/>
             </a:pPr>
             <a:r>
@@ -2442,6 +1856,13 @@
             <a:prstDash val="solid"/>
           </a:ln>
         </p:spPr>
+        <p:txBody>
+          <a:bodyPr/>
+          <a:lstStyle/>
+          <a:p>
+            <a:endParaRPr lang="en-SA"/>
+          </a:p>
+        </p:txBody>
       </p:sp>
       <p:sp>
         <p:nvSpPr>
@@ -2469,6 +1890,13 @@
             <a:prstDash val="solid"/>
           </a:ln>
         </p:spPr>
+        <p:txBody>
+          <a:bodyPr/>
+          <a:lstStyle/>
+          <a:p>
+            <a:endParaRPr lang="en-SA"/>
+          </a:p>
+        </p:txBody>
       </p:sp>
       <p:sp>
         <p:nvSpPr>
@@ -2491,7 +1919,7 @@
           <a:bodyPr wrap="square" rtlCol="0" anchor="ctr"/>
           <a:lstStyle/>
           <a:p>
-            <a:pPr algn="ctr" indent="0" marL="0">
+            <a:pPr marL="0" indent="0" algn="ctr">
               <a:buNone/>
             </a:pPr>
             <a:r>
@@ -2508,7 +1936,7 @@
             <a:endParaRPr lang="en-US" sz="1700" dirty="0"/>
           </a:p>
           <a:p>
-            <a:pPr algn="ctr" indent="0" marL="0">
+            <a:pPr marL="0" indent="0" algn="ctr">
               <a:buNone/>
             </a:pPr>
             <a:r>
@@ -2520,7 +1948,7 @@
                 <a:ea typeface="Arial" pitchFamily="34" charset="-122"/>
                 <a:cs typeface="Arial" pitchFamily="34" charset="-120"/>
               </a:rPr>
-              <a:t>Professional report</a:t>
+              <a:t>report</a:t>
             </a:r>
             <a:endParaRPr lang="en-US" sz="1700" dirty="0"/>
           </a:p>
@@ -2547,7 +1975,7 @@
           <a:bodyPr wrap="square" rtlCol="0" anchor="ctr"/>
           <a:lstStyle/>
           <a:p>
-            <a:pPr algn="l" indent="0" marL="0">
+            <a:pPr marL="0" indent="0" algn="l">
               <a:buNone/>
             </a:pPr>
             <a:r>
@@ -2567,41 +1995,14 @@
       </p:sp>
       <p:sp>
         <p:nvSpPr>
-          <p:cNvPr id="18" name="Shape 16"/>
-          <p:cNvSpPr/>
-          <p:nvPr/>
-        </p:nvSpPr>
-        <p:spPr>
-          <a:xfrm>
-            <a:off x="777240" y="5440680"/>
-            <a:ext cx="10607040" cy="566928"/>
-          </a:xfrm>
-          <a:prstGeom prst="roundRect">
-            <a:avLst>
-              <a:gd name="adj" fmla="val 8065"/>
-            </a:avLst>
-          </a:prstGeom>
-          <a:solidFill>
-            <a:srgbClr val="DCFCE7"/>
-          </a:solidFill>
-          <a:ln w="12700">
-            <a:solidFill>
-              <a:srgbClr val="DCFCE7"/>
-            </a:solidFill>
-            <a:prstDash val="solid"/>
-          </a:ln>
-        </p:spPr>
-      </p:sp>
-      <p:sp>
-        <p:nvSpPr>
-          <p:cNvPr id="19" name="Text 17"/>
-          <p:cNvSpPr/>
-          <p:nvPr/>
-        </p:nvSpPr>
-        <p:spPr>
-          <a:xfrm>
-            <a:off x="1005840" y="5614416"/>
-            <a:ext cx="10149840" cy="219456"/>
+          <p:cNvPr id="20" name="Text 18"/>
+          <p:cNvSpPr/>
+          <p:nvPr/>
+        </p:nvSpPr>
+        <p:spPr>
+          <a:xfrm>
+            <a:off x="457200" y="6492240"/>
+            <a:ext cx="9601200" cy="182880"/>
           </a:xfrm>
           <a:prstGeom prst="rect">
             <a:avLst/>
@@ -2613,46 +2014,7 @@
           <a:bodyPr wrap="square" rtlCol="0" anchor="ctr"/>
           <a:lstStyle/>
           <a:p>
-            <a:pPr algn="ctr" indent="0" marL="0">
-              <a:buNone/>
-            </a:pPr>
-            <a:r>
-              <a:rPr lang="en-US" sz="1250" b="1" dirty="0">
-                <a:solidFill>
-                  <a:srgbClr val="245C2F"/>
-                </a:solidFill>
-                <a:latin typeface="Arial" pitchFamily="34" charset="0"/>
-                <a:ea typeface="Arial" pitchFamily="34" charset="-122"/>
-                <a:cs typeface="Arial" pitchFamily="34" charset="-120"/>
-              </a:rPr>
-              <a:t>This makes the project stronger academically because it shows implementation plus validation, not just theory.</a:t>
-            </a:r>
-            <a:endParaRPr lang="en-US" sz="1250" dirty="0"/>
-          </a:p>
-        </p:txBody>
-      </p:sp>
-      <p:sp>
-        <p:nvSpPr>
-          <p:cNvPr id="20" name="Text 18"/>
-          <p:cNvSpPr/>
-          <p:nvPr/>
-        </p:nvSpPr>
-        <p:spPr>
-          <a:xfrm>
-            <a:off x="457200" y="6492240"/>
-            <a:ext cx="9601200" cy="182880"/>
-          </a:xfrm>
-          <a:prstGeom prst="rect">
-            <a:avLst/>
-          </a:prstGeom>
-          <a:noFill/>
-          <a:ln/>
-        </p:spPr>
-        <p:txBody>
-          <a:bodyPr wrap="square" rtlCol="0" anchor="ctr"/>
-          <a:lstStyle/>
-          <a:p>
-            <a:pPr indent="0" marL="0">
+            <a:pPr marL="0" indent="0">
               <a:buNone/>
             </a:pPr>
             <a:r>
@@ -2661,10 +2023,9 @@
                   <a:srgbClr val="6B7280"/>
                 </a:solidFill>
                 <a:latin typeface="Arial" pitchFamily="34" charset="0"/>
-                <a:ea typeface="Arial" pitchFamily="34" charset="-122"/>
                 <a:cs typeface="Arial" pitchFamily="34" charset="-120"/>
               </a:rPr>
-              <a:t>Academic project package: configuration + security review evidence</a:t>
+              <a:t>WT255</a:t>
             </a:r>
             <a:endParaRPr lang="en-US" sz="900" dirty="0"/>
           </a:p>
@@ -2719,6 +2080,13 @@
             <a:prstDash val="solid"/>
           </a:ln>
         </p:spPr>
+        <p:txBody>
+          <a:bodyPr/>
+          <a:lstStyle/>
+          <a:p>
+            <a:endParaRPr lang="en-SA"/>
+          </a:p>
+        </p:txBody>
       </p:sp>
       <p:sp>
         <p:nvSpPr>
@@ -2741,7 +2109,7 @@
           <a:bodyPr wrap="square" rtlCol="0" anchor="ctr"/>
           <a:lstStyle/>
           <a:p>
-            <a:pPr indent="0" marL="0">
+            <a:pPr marL="0" indent="0">
               <a:buNone/>
             </a:pPr>
             <a:r>
@@ -2780,7 +2148,7 @@
           <a:bodyPr wrap="square" rtlCol="0" anchor="ctr"/>
           <a:lstStyle/>
           <a:p>
-            <a:pPr indent="0" marL="0">
+            <a:pPr marL="0" indent="0">
               <a:buNone/>
             </a:pPr>
             <a:r>
@@ -2820,6 +2188,13 @@
             <a:prstDash val="solid"/>
           </a:ln>
         </p:spPr>
+        <p:txBody>
+          <a:bodyPr/>
+          <a:lstStyle/>
+          <a:p>
+            <a:endParaRPr lang="en-SA"/>
+          </a:p>
+        </p:txBody>
       </p:sp>
       <p:sp>
         <p:nvSpPr>
@@ -2847,6 +2222,13 @@
             <a:prstDash val="solid"/>
           </a:ln>
         </p:spPr>
+        <p:txBody>
+          <a:bodyPr/>
+          <a:lstStyle/>
+          <a:p>
+            <a:endParaRPr lang="en-SA"/>
+          </a:p>
+        </p:txBody>
       </p:sp>
       <p:sp>
         <p:nvSpPr>
@@ -2869,7 +2251,7 @@
           <a:bodyPr wrap="square" rtlCol="0" anchor="ctr"/>
           <a:lstStyle/>
           <a:p>
-            <a:pPr indent="0" marL="0">
+            <a:pPr marL="0" indent="0">
               <a:buNone/>
             </a:pPr>
             <a:r>
@@ -2889,14 +2271,14 @@
       </p:sp>
       <p:pic>
         <p:nvPicPr>
-          <p:cNvPr id="8" name="Image 0" descr="/mnt/data/security-servers-project-assets/DNS_config.png">    </p:cNvPr>
+          <p:cNvPr id="8" name="Image 0" descr="/mnt/data/security-servers-project-assets/DNS_config.png"/>
           <p:cNvPicPr>
             <a:picLocks noChangeAspect="1"/>
           </p:cNvPicPr>
           <p:nvPr/>
         </p:nvPicPr>
         <p:blipFill>
-          <a:blip r:embed="rId1"/>
+          <a:blip r:embed="rId3"/>
           <a:stretch>
             <a:fillRect/>
           </a:stretch>
@@ -2937,6 +2319,13 @@
             <a:prstDash val="solid"/>
           </a:ln>
         </p:spPr>
+        <p:txBody>
+          <a:bodyPr/>
+          <a:lstStyle/>
+          <a:p>
+            <a:endParaRPr lang="en-SA"/>
+          </a:p>
+        </p:txBody>
       </p:sp>
       <p:sp>
         <p:nvSpPr>
@@ -2959,7 +2348,7 @@
           <a:bodyPr wrap="square" rtlCol="0" anchor="ctr"/>
           <a:lstStyle/>
           <a:p>
-            <a:pPr indent="0" marL="0">
+            <a:pPr marL="0" indent="0">
               <a:buNone/>
             </a:pPr>
             <a:r>
@@ -2979,14 +2368,14 @@
       </p:sp>
       <p:pic>
         <p:nvPicPr>
-          <p:cNvPr id="11" name="Image 1" descr="/mnt/data/security-servers-project-assets/DNS_output.png">    </p:cNvPr>
+          <p:cNvPr id="11" name="Image 1" descr="/mnt/data/security-servers-project-assets/DNS_output.png"/>
           <p:cNvPicPr>
             <a:picLocks noChangeAspect="1"/>
           </p:cNvPicPr>
           <p:nvPr/>
         </p:nvPicPr>
         <p:blipFill>
-          <a:blip r:embed="rId2"/>
+          <a:blip r:embed="rId4"/>
           <a:stretch>
             <a:fillRect/>
           </a:stretch>
@@ -3027,6 +2416,13 @@
             <a:prstDash val="solid"/>
           </a:ln>
         </p:spPr>
+        <p:txBody>
+          <a:bodyPr/>
+          <a:lstStyle/>
+          <a:p>
+            <a:endParaRPr lang="en-SA"/>
+          </a:p>
+        </p:txBody>
       </p:sp>
       <p:sp>
         <p:nvSpPr>
@@ -3049,7 +2445,7 @@
           <a:bodyPr wrap="square" rtlCol="0" anchor="ctr"/>
           <a:lstStyle/>
           <a:p>
-            <a:pPr algn="ctr" indent="0" marL="0">
+            <a:pPr marL="0" indent="0" algn="ctr">
               <a:buNone/>
             </a:pPr>
             <a:r>
@@ -3088,7 +2484,7 @@
           <a:bodyPr wrap="square" rtlCol="0" anchor="ctr"/>
           <a:lstStyle/>
           <a:p>
-            <a:pPr indent="0" marL="0">
+            <a:pPr marL="0" indent="0">
               <a:buNone/>
             </a:pPr>
             <a:r>
@@ -3100,7 +2496,7 @@
                 <a:ea typeface="Arial" pitchFamily="34" charset="-122"/>
                 <a:cs typeface="Arial" pitchFamily="34" charset="-120"/>
               </a:rPr>
-              <a:t>DNS-Server: 3 files = config file + review file + PDF report</a:t>
+              <a:t>DNS-Server: = config file + review file + PDF report</a:t>
             </a:r>
             <a:endParaRPr lang="en-US" sz="900" dirty="0"/>
           </a:p>
@@ -3155,6 +2551,13 @@
             <a:prstDash val="solid"/>
           </a:ln>
         </p:spPr>
+        <p:txBody>
+          <a:bodyPr/>
+          <a:lstStyle/>
+          <a:p>
+            <a:endParaRPr lang="en-SA"/>
+          </a:p>
+        </p:txBody>
       </p:sp>
       <p:sp>
         <p:nvSpPr>
@@ -3177,7 +2580,7 @@
           <a:bodyPr wrap="square" rtlCol="0" anchor="ctr"/>
           <a:lstStyle/>
           <a:p>
-            <a:pPr indent="0" marL="0">
+            <a:pPr marL="0" indent="0">
               <a:buNone/>
             </a:pPr>
             <a:r>
@@ -3216,7 +2619,7 @@
           <a:bodyPr wrap="square" rtlCol="0" anchor="ctr"/>
           <a:lstStyle/>
           <a:p>
-            <a:pPr indent="0" marL="0">
+            <a:pPr marL="0" indent="0">
               <a:buNone/>
             </a:pPr>
             <a:r>
@@ -3256,6 +2659,13 @@
             <a:prstDash val="solid"/>
           </a:ln>
         </p:spPr>
+        <p:txBody>
+          <a:bodyPr/>
+          <a:lstStyle/>
+          <a:p>
+            <a:endParaRPr lang="en-SA"/>
+          </a:p>
+        </p:txBody>
       </p:sp>
       <p:sp>
         <p:nvSpPr>
@@ -3283,6 +2693,13 @@
             <a:prstDash val="solid"/>
           </a:ln>
         </p:spPr>
+        <p:txBody>
+          <a:bodyPr/>
+          <a:lstStyle/>
+          <a:p>
+            <a:endParaRPr lang="en-SA"/>
+          </a:p>
+        </p:txBody>
       </p:sp>
       <p:sp>
         <p:nvSpPr>
@@ -3305,7 +2722,7 @@
           <a:bodyPr wrap="square" rtlCol="0" anchor="ctr"/>
           <a:lstStyle/>
           <a:p>
-            <a:pPr indent="0" marL="0">
+            <a:pPr marL="0" indent="0">
               <a:buNone/>
             </a:pPr>
             <a:r>
@@ -3325,14 +2742,14 @@
       </p:sp>
       <p:pic>
         <p:nvPicPr>
-          <p:cNvPr id="8" name="Image 0" descr="/mnt/data/security-servers-project-assets/Mail_config.png">    </p:cNvPr>
+          <p:cNvPr id="8" name="Image 0" descr="/mnt/data/security-servers-project-assets/Mail_config.png"/>
           <p:cNvPicPr>
             <a:picLocks noChangeAspect="1"/>
           </p:cNvPicPr>
           <p:nvPr/>
         </p:nvPicPr>
         <p:blipFill>
-          <a:blip r:embed="rId1"/>
+          <a:blip r:embed="rId3"/>
           <a:stretch>
             <a:fillRect/>
           </a:stretch>
@@ -3373,6 +2790,13 @@
             <a:prstDash val="solid"/>
           </a:ln>
         </p:spPr>
+        <p:txBody>
+          <a:bodyPr/>
+          <a:lstStyle/>
+          <a:p>
+            <a:endParaRPr lang="en-SA"/>
+          </a:p>
+        </p:txBody>
       </p:sp>
       <p:sp>
         <p:nvSpPr>
@@ -3395,7 +2819,7 @@
           <a:bodyPr wrap="square" rtlCol="0" anchor="ctr"/>
           <a:lstStyle/>
           <a:p>
-            <a:pPr indent="0" marL="0">
+            <a:pPr marL="0" indent="0">
               <a:buNone/>
             </a:pPr>
             <a:r>
@@ -3415,14 +2839,14 @@
       </p:sp>
       <p:pic>
         <p:nvPicPr>
-          <p:cNvPr id="11" name="Image 1" descr="/mnt/data/security-servers-project-assets/Mail_output.png">    </p:cNvPr>
+          <p:cNvPr id="11" name="Image 1" descr="/mnt/data/security-servers-project-assets/Mail_output.png"/>
           <p:cNvPicPr>
             <a:picLocks noChangeAspect="1"/>
           </p:cNvPicPr>
           <p:nvPr/>
         </p:nvPicPr>
         <p:blipFill>
-          <a:blip r:embed="rId2"/>
+          <a:blip r:embed="rId4"/>
           <a:stretch>
             <a:fillRect/>
           </a:stretch>
@@ -3463,6 +2887,13 @@
             <a:prstDash val="solid"/>
           </a:ln>
         </p:spPr>
+        <p:txBody>
+          <a:bodyPr/>
+          <a:lstStyle/>
+          <a:p>
+            <a:endParaRPr lang="en-SA"/>
+          </a:p>
+        </p:txBody>
       </p:sp>
       <p:sp>
         <p:nvSpPr>
@@ -3485,7 +2916,7 @@
           <a:bodyPr wrap="square" rtlCol="0" anchor="ctr"/>
           <a:lstStyle/>
           <a:p>
-            <a:pPr algn="ctr" indent="0" marL="0">
+            <a:pPr marL="0" indent="0" algn="ctr">
               <a:buNone/>
             </a:pPr>
             <a:r>
@@ -3524,7 +2955,7 @@
           <a:bodyPr wrap="square" rtlCol="0" anchor="ctr"/>
           <a:lstStyle/>
           <a:p>
-            <a:pPr indent="0" marL="0">
+            <a:pPr marL="0" indent="0">
               <a:buNone/>
             </a:pPr>
             <a:r>
@@ -3536,7 +2967,7 @@
                 <a:ea typeface="Arial" pitchFamily="34" charset="-122"/>
                 <a:cs typeface="Arial" pitchFamily="34" charset="-120"/>
               </a:rPr>
-              <a:t>Mail-Server: 3 files = config file + review file + PDF report</a:t>
+              <a:t>Mail-Server: = config file + review file + PDF report</a:t>
             </a:r>
             <a:endParaRPr lang="en-US" sz="900" dirty="0"/>
           </a:p>
@@ -3591,6 +3022,13 @@
             <a:prstDash val="solid"/>
           </a:ln>
         </p:spPr>
+        <p:txBody>
+          <a:bodyPr/>
+          <a:lstStyle/>
+          <a:p>
+            <a:endParaRPr lang="en-SA"/>
+          </a:p>
+        </p:txBody>
       </p:sp>
       <p:sp>
         <p:nvSpPr>
@@ -3613,7 +3051,7 @@
           <a:bodyPr wrap="square" rtlCol="0" anchor="ctr"/>
           <a:lstStyle/>
           <a:p>
-            <a:pPr indent="0" marL="0">
+            <a:pPr marL="0" indent="0">
               <a:buNone/>
             </a:pPr>
             <a:r>
@@ -3652,7 +3090,7 @@
           <a:bodyPr wrap="square" rtlCol="0" anchor="ctr"/>
           <a:lstStyle/>
           <a:p>
-            <a:pPr indent="0" marL="0">
+            <a:pPr marL="0" indent="0">
               <a:buNone/>
             </a:pPr>
             <a:r>
@@ -3692,6 +3130,13 @@
             <a:prstDash val="solid"/>
           </a:ln>
         </p:spPr>
+        <p:txBody>
+          <a:bodyPr/>
+          <a:lstStyle/>
+          <a:p>
+            <a:endParaRPr lang="en-SA"/>
+          </a:p>
+        </p:txBody>
       </p:sp>
       <p:sp>
         <p:nvSpPr>
@@ -3719,6 +3164,13 @@
             <a:prstDash val="solid"/>
           </a:ln>
         </p:spPr>
+        <p:txBody>
+          <a:bodyPr/>
+          <a:lstStyle/>
+          <a:p>
+            <a:endParaRPr lang="en-SA"/>
+          </a:p>
+        </p:txBody>
       </p:sp>
       <p:sp>
         <p:nvSpPr>
@@ -3741,7 +3193,7 @@
           <a:bodyPr wrap="square" rtlCol="0" anchor="ctr"/>
           <a:lstStyle/>
           <a:p>
-            <a:pPr indent="0" marL="0">
+            <a:pPr marL="0" indent="0">
               <a:buNone/>
             </a:pPr>
             <a:r>
@@ -3761,14 +3213,14 @@
       </p:sp>
       <p:pic>
         <p:nvPicPr>
-          <p:cNvPr id="8" name="Image 0" descr="/mnt/data/security-servers-project-assets/DB_config.png">    </p:cNvPr>
+          <p:cNvPr id="8" name="Image 0" descr="/mnt/data/security-servers-project-assets/DB_config.png"/>
           <p:cNvPicPr>
             <a:picLocks noChangeAspect="1"/>
           </p:cNvPicPr>
           <p:nvPr/>
         </p:nvPicPr>
         <p:blipFill>
-          <a:blip r:embed="rId1"/>
+          <a:blip r:embed="rId3"/>
           <a:stretch>
             <a:fillRect/>
           </a:stretch>
@@ -3809,6 +3261,13 @@
             <a:prstDash val="solid"/>
           </a:ln>
         </p:spPr>
+        <p:txBody>
+          <a:bodyPr/>
+          <a:lstStyle/>
+          <a:p>
+            <a:endParaRPr lang="en-SA"/>
+          </a:p>
+        </p:txBody>
       </p:sp>
       <p:sp>
         <p:nvSpPr>
@@ -3831,7 +3290,7 @@
           <a:bodyPr wrap="square" rtlCol="0" anchor="ctr"/>
           <a:lstStyle/>
           <a:p>
-            <a:pPr indent="0" marL="0">
+            <a:pPr marL="0" indent="0">
               <a:buNone/>
             </a:pPr>
             <a:r>
@@ -3851,14 +3310,14 @@
       </p:sp>
       <p:pic>
         <p:nvPicPr>
-          <p:cNvPr id="11" name="Image 1" descr="/mnt/data/security-servers-project-assets/DB_output.png">    </p:cNvPr>
+          <p:cNvPr id="11" name="Image 1" descr="/mnt/data/security-servers-project-assets/DB_output.png"/>
           <p:cNvPicPr>
             <a:picLocks noChangeAspect="1"/>
           </p:cNvPicPr>
           <p:nvPr/>
         </p:nvPicPr>
         <p:blipFill>
-          <a:blip r:embed="rId2"/>
+          <a:blip r:embed="rId4"/>
           <a:stretch>
             <a:fillRect/>
           </a:stretch>
@@ -3899,6 +3358,13 @@
             <a:prstDash val="solid"/>
           </a:ln>
         </p:spPr>
+        <p:txBody>
+          <a:bodyPr/>
+          <a:lstStyle/>
+          <a:p>
+            <a:endParaRPr lang="en-SA"/>
+          </a:p>
+        </p:txBody>
       </p:sp>
       <p:sp>
         <p:nvSpPr>
@@ -3921,7 +3387,7 @@
           <a:bodyPr wrap="square" rtlCol="0" anchor="ctr"/>
           <a:lstStyle/>
           <a:p>
-            <a:pPr algn="ctr" indent="0" marL="0">
+            <a:pPr marL="0" indent="0" algn="ctr">
               <a:buNone/>
             </a:pPr>
             <a:r>
@@ -3960,7 +3426,7 @@
           <a:bodyPr wrap="square" rtlCol="0" anchor="ctr"/>
           <a:lstStyle/>
           <a:p>
-            <a:pPr indent="0" marL="0">
+            <a:pPr marL="0" indent="0">
               <a:buNone/>
             </a:pPr>
             <a:r>
@@ -3972,514 +3438,7 @@
                 <a:ea typeface="Arial" pitchFamily="34" charset="-122"/>
                 <a:cs typeface="Arial" pitchFamily="34" charset="-120"/>
               </a:rPr>
-              <a:t>Database-Server: 3 files = config file + review file + PDF report</a:t>
-            </a:r>
-            <a:endParaRPr lang="en-US" sz="900" dirty="0"/>
-          </a:p>
-        </p:txBody>
-      </p:sp>
-    </p:spTree>
-  </p:cSld>
-  <p:clrMapOvr>
-    <a:masterClrMapping/>
-  </p:clrMapOvr>
-</p:sld>
-</file>
-
-<file path=ppt/slides/slide6.xml><?xml version="1.0" encoding="utf-8"?>
-<p:sld xmlns:a="http://schemas.openxmlformats.org/drawingml/2006/main" xmlns:r="http://schemas.openxmlformats.org/officeDocument/2006/relationships" xmlns:p="http://schemas.openxmlformats.org/presentationml/2006/main">
-  <p:cSld name="Slide 6">
-    <p:spTree>
-      <p:nvGrpSpPr>
-        <p:cNvPr id="1" name=""/>
-        <p:cNvGrpSpPr/>
-        <p:nvPr/>
-      </p:nvGrpSpPr>
-      <p:grpSpPr>
-        <a:xfrm>
-          <a:off x="0" y="0"/>
-          <a:ext cx="0" cy="0"/>
-          <a:chOff x="0" y="0"/>
-          <a:chExt cx="0" cy="0"/>
-        </a:xfrm>
-      </p:grpSpPr>
-      <p:sp>
-        <p:nvSpPr>
-          <p:cNvPr id="2" name="Shape 0"/>
-          <p:cNvSpPr/>
-          <p:nvPr/>
-        </p:nvSpPr>
-        <p:spPr>
-          <a:xfrm>
-            <a:off x="0" y="0"/>
-            <a:ext cx="12191695" cy="6858000"/>
-          </a:xfrm>
-          <a:prstGeom prst="rect">
-            <a:avLst/>
-          </a:prstGeom>
-          <a:solidFill>
-            <a:srgbClr val="F7F9FC"/>
-          </a:solidFill>
-          <a:ln w="12700">
-            <a:solidFill>
-              <a:srgbClr val="F7F9FC"/>
-            </a:solidFill>
-            <a:prstDash val="solid"/>
-          </a:ln>
-        </p:spPr>
-      </p:sp>
-      <p:sp>
-        <p:nvSpPr>
-          <p:cNvPr id="3" name="Text 1"/>
-          <p:cNvSpPr/>
-          <p:nvPr/>
-        </p:nvSpPr>
-        <p:spPr>
-          <a:xfrm>
-            <a:off x="457200" y="320040"/>
-            <a:ext cx="7863840" cy="411480"/>
-          </a:xfrm>
-          <a:prstGeom prst="rect">
-            <a:avLst/>
-          </a:prstGeom>
-          <a:noFill/>
-          <a:ln/>
-        </p:spPr>
-        <p:txBody>
-          <a:bodyPr wrap="square" rtlCol="0" anchor="ctr"/>
-          <a:lstStyle/>
-          <a:p>
-            <a:pPr indent="0" marL="0">
-              <a:buNone/>
-            </a:pPr>
-            <a:r>
-              <a:rPr lang="en-US" sz="2600" b="1" dirty="0">
-                <a:solidFill>
-                  <a:srgbClr val="17324D"/>
-                </a:solidFill>
-                <a:latin typeface="Arial" pitchFamily="34" charset="0"/>
-                <a:ea typeface="Arial" pitchFamily="34" charset="-122"/>
-                <a:cs typeface="Arial" pitchFamily="34" charset="-120"/>
-              </a:rPr>
-              <a:t>Final deliverables</a:t>
-            </a:r>
-            <a:endParaRPr lang="en-US" sz="2600" dirty="0"/>
-          </a:p>
-        </p:txBody>
-      </p:sp>
-      <p:sp>
-        <p:nvSpPr>
-          <p:cNvPr id="4" name="Text 2"/>
-          <p:cNvSpPr/>
-          <p:nvPr/>
-        </p:nvSpPr>
-        <p:spPr>
-          <a:xfrm>
-            <a:off x="457200" y="749808"/>
-            <a:ext cx="8961120" cy="256032"/>
-          </a:xfrm>
-          <a:prstGeom prst="rect">
-            <a:avLst/>
-          </a:prstGeom>
-          <a:noFill/>
-          <a:ln/>
-        </p:spPr>
-        <p:txBody>
-          <a:bodyPr wrap="square" rtlCol="0" anchor="ctr"/>
-          <a:lstStyle/>
-          <a:p>
-            <a:pPr indent="0" marL="0">
-              <a:buNone/>
-            </a:pPr>
-            <a:r>
-              <a:rPr lang="en-US" sz="1050" dirty="0">
-                <a:solidFill>
-                  <a:srgbClr val="5B6470"/>
-                </a:solidFill>
-                <a:latin typeface="Arial" pitchFamily="34" charset="0"/>
-                <a:ea typeface="Arial" pitchFamily="34" charset="-122"/>
-                <a:cs typeface="Arial" pitchFamily="34" charset="-120"/>
-              </a:rPr>
-              <a:t>Everything ready to download and upload to GitHub</a:t>
-            </a:r>
-            <a:endParaRPr lang="en-US" sz="1050" dirty="0"/>
-          </a:p>
-        </p:txBody>
-      </p:sp>
-      <p:sp>
-        <p:nvSpPr>
-          <p:cNvPr id="5" name="Shape 3"/>
-          <p:cNvSpPr/>
-          <p:nvPr/>
-        </p:nvSpPr>
-        <p:spPr>
-          <a:xfrm>
-            <a:off x="457200" y="1005840"/>
-            <a:ext cx="11247120" cy="0"/>
-          </a:xfrm>
-          <a:prstGeom prst="line">
-            <a:avLst/>
-          </a:prstGeom>
-          <a:noFill/>
-          <a:ln w="12700">
-            <a:solidFill>
-              <a:srgbClr val="D6DFEA"/>
-            </a:solidFill>
-            <a:prstDash val="solid"/>
-          </a:ln>
-        </p:spPr>
-      </p:sp>
-      <p:sp>
-        <p:nvSpPr>
-          <p:cNvPr id="6" name="Shape 4"/>
-          <p:cNvSpPr/>
-          <p:nvPr/>
-        </p:nvSpPr>
-        <p:spPr>
-          <a:xfrm>
-            <a:off x="685800" y="1417320"/>
-            <a:ext cx="10972800" cy="4480560"/>
-          </a:xfrm>
-          <a:prstGeom prst="roundRect">
-            <a:avLst>
-              <a:gd name="adj" fmla="val 1224"/>
-            </a:avLst>
-          </a:prstGeom>
-          <a:solidFill>
-            <a:srgbClr val="FFFFFF"/>
-          </a:solidFill>
-          <a:ln w="12700">
-            <a:solidFill>
-              <a:srgbClr val="D6DFEA"/>
-            </a:solidFill>
-            <a:prstDash val="solid"/>
-          </a:ln>
-        </p:spPr>
-      </p:sp>
-      <p:sp>
-        <p:nvSpPr>
-          <p:cNvPr id="7" name="Text 5"/>
-          <p:cNvSpPr/>
-          <p:nvPr/>
-        </p:nvSpPr>
-        <p:spPr>
-          <a:xfrm>
-            <a:off x="960120" y="1737360"/>
-            <a:ext cx="1828800" cy="228600"/>
-          </a:xfrm>
-          <a:prstGeom prst="rect">
-            <a:avLst/>
-          </a:prstGeom>
-          <a:noFill/>
-          <a:ln/>
-        </p:spPr>
-        <p:txBody>
-          <a:bodyPr wrap="square" rtlCol="0" anchor="ctr"/>
-          <a:lstStyle/>
-          <a:p>
-            <a:pPr indent="0" marL="0">
-              <a:buNone/>
-            </a:pPr>
-            <a:r>
-              <a:rPr lang="en-US" sz="1800" b="1" dirty="0">
-                <a:solidFill>
-                  <a:srgbClr val="17324D"/>
-                </a:solidFill>
-                <a:latin typeface="Arial" pitchFamily="34" charset="0"/>
-                <a:ea typeface="Arial" pitchFamily="34" charset="-122"/>
-                <a:cs typeface="Arial" pitchFamily="34" charset="-120"/>
-              </a:rPr>
-              <a:t>Root files</a:t>
-            </a:r>
-            <a:endParaRPr lang="en-US" sz="1800" dirty="0"/>
-          </a:p>
-        </p:txBody>
-      </p:sp>
-      <p:sp>
-        <p:nvSpPr>
-          <p:cNvPr id="8" name="Text 6"/>
-          <p:cNvSpPr/>
-          <p:nvPr/>
-        </p:nvSpPr>
-        <p:spPr>
-          <a:xfrm>
-            <a:off x="960120" y="2148840"/>
-            <a:ext cx="3657600" cy="914400"/>
-          </a:xfrm>
-          <a:prstGeom prst="rect">
-            <a:avLst/>
-          </a:prstGeom>
-          <a:noFill/>
-          <a:ln/>
-        </p:spPr>
-        <p:txBody>
-          <a:bodyPr wrap="square" rtlCol="0" anchor="ctr"/>
-          <a:lstStyle/>
-          <a:p>
-            <a:pPr indent="0" marL="0">
-              <a:buNone/>
-            </a:pPr>
-            <a:r>
-              <a:rPr lang="en-US" sz="1500" dirty="0">
-                <a:solidFill>
-                  <a:srgbClr val="1E293B"/>
-                </a:solidFill>
-                <a:latin typeface="Arial" pitchFamily="34" charset="0"/>
-                <a:ea typeface="Arial" pitchFamily="34" charset="-122"/>
-                <a:cs typeface="Arial" pitchFamily="34" charset="-120"/>
-              </a:rPr>
-              <a:t>• README.md</a:t>
-            </a:r>
-            <a:endParaRPr lang="en-US" sz="1500" dirty="0"/>
-          </a:p>
-          <a:p>
-            <a:pPr indent="0" marL="0">
-              <a:buNone/>
-            </a:pPr>
-            <a:r>
-              <a:rPr lang="en-US" sz="1500" dirty="0">
-                <a:solidFill>
-                  <a:srgbClr val="1E293B"/>
-                </a:solidFill>
-                <a:latin typeface="Arial" pitchFamily="34" charset="0"/>
-                <a:ea typeface="Arial" pitchFamily="34" charset="-122"/>
-                <a:cs typeface="Arial" pitchFamily="34" charset="-120"/>
-              </a:rPr>
-              <a:t>• Updated_Security_Servers_Project.pptx</a:t>
-            </a:r>
-            <a:endParaRPr lang="en-US" sz="1500" dirty="0"/>
-          </a:p>
-        </p:txBody>
-      </p:sp>
-      <p:sp>
-        <p:nvSpPr>
-          <p:cNvPr id="9" name="Text 7"/>
-          <p:cNvSpPr/>
-          <p:nvPr/>
-        </p:nvSpPr>
-        <p:spPr>
-          <a:xfrm>
-            <a:off x="5669280" y="1737360"/>
-            <a:ext cx="3474720" cy="228600"/>
-          </a:xfrm>
-          <a:prstGeom prst="rect">
-            <a:avLst/>
-          </a:prstGeom>
-          <a:noFill/>
-          <a:ln/>
-        </p:spPr>
-        <p:txBody>
-          <a:bodyPr wrap="square" rtlCol="0" anchor="ctr"/>
-          <a:lstStyle/>
-          <a:p>
-            <a:pPr indent="0" marL="0">
-              <a:buNone/>
-            </a:pPr>
-            <a:r>
-              <a:rPr lang="en-US" sz="1800" b="1" dirty="0">
-                <a:solidFill>
-                  <a:srgbClr val="17324D"/>
-                </a:solidFill>
-                <a:latin typeface="Arial" pitchFamily="34" charset="0"/>
-                <a:ea typeface="Arial" pitchFamily="34" charset="-122"/>
-                <a:cs typeface="Arial" pitchFamily="34" charset="-120"/>
-              </a:rPr>
-              <a:t>Server folder contents (each folder)</a:t>
-            </a:r>
-            <a:endParaRPr lang="en-US" sz="1800" dirty="0"/>
-          </a:p>
-        </p:txBody>
-      </p:sp>
-      <p:sp>
-        <p:nvSpPr>
-          <p:cNvPr id="10" name="Text 8"/>
-          <p:cNvSpPr/>
-          <p:nvPr/>
-        </p:nvSpPr>
-        <p:spPr>
-          <a:xfrm>
-            <a:off x="5669280" y="2148840"/>
-            <a:ext cx="4389120" cy="914400"/>
-          </a:xfrm>
-          <a:prstGeom prst="rect">
-            <a:avLst/>
-          </a:prstGeom>
-          <a:noFill/>
-          <a:ln/>
-        </p:spPr>
-        <p:txBody>
-          <a:bodyPr wrap="square" rtlCol="0" anchor="ctr"/>
-          <a:lstStyle/>
-          <a:p>
-            <a:pPr indent="0" marL="0">
-              <a:buNone/>
-            </a:pPr>
-            <a:r>
-              <a:rPr lang="en-US" sz="1500" dirty="0">
-                <a:solidFill>
-                  <a:srgbClr val="1E293B"/>
-                </a:solidFill>
-                <a:latin typeface="Arial" pitchFamily="34" charset="0"/>
-                <a:ea typeface="Arial" pitchFamily="34" charset="-122"/>
-                <a:cs typeface="Arial" pitchFamily="34" charset="-120"/>
-              </a:rPr>
-              <a:t>• 1 configuration file</a:t>
-            </a:r>
-            <a:endParaRPr lang="en-US" sz="1500" dirty="0"/>
-          </a:p>
-          <a:p>
-            <a:pPr indent="0" marL="0">
-              <a:buNone/>
-            </a:pPr>
-            <a:r>
-              <a:rPr lang="en-US" sz="1500" dirty="0">
-                <a:solidFill>
-                  <a:srgbClr val="1E293B"/>
-                </a:solidFill>
-                <a:latin typeface="Arial" pitchFamily="34" charset="0"/>
-                <a:ea typeface="Arial" pitchFamily="34" charset="-122"/>
-                <a:cs typeface="Arial" pitchFamily="34" charset="-120"/>
-              </a:rPr>
-              <a:t>• 1 security review file</a:t>
-            </a:r>
-            <a:endParaRPr lang="en-US" sz="1500" dirty="0"/>
-          </a:p>
-          <a:p>
-            <a:pPr indent="0" marL="0">
-              <a:buNone/>
-            </a:pPr>
-            <a:r>
-              <a:rPr lang="en-US" sz="1500" dirty="0">
-                <a:solidFill>
-                  <a:srgbClr val="1E293B"/>
-                </a:solidFill>
-                <a:latin typeface="Arial" pitchFamily="34" charset="0"/>
-                <a:ea typeface="Arial" pitchFamily="34" charset="-122"/>
-                <a:cs typeface="Arial" pitchFamily="34" charset="-120"/>
-              </a:rPr>
-              <a:t>• 1 professional PDF report</a:t>
-            </a:r>
-            <a:endParaRPr lang="en-US" sz="1500" dirty="0"/>
-          </a:p>
-        </p:txBody>
-      </p:sp>
-      <p:sp>
-        <p:nvSpPr>
-          <p:cNvPr id="11" name="Shape 9"/>
-          <p:cNvSpPr/>
-          <p:nvPr/>
-        </p:nvSpPr>
-        <p:spPr>
-          <a:xfrm>
-            <a:off x="960120" y="3749040"/>
-            <a:ext cx="9692640" cy="1097280"/>
-          </a:xfrm>
-          <a:prstGeom prst="roundRect">
-            <a:avLst>
-              <a:gd name="adj" fmla="val 4167"/>
-            </a:avLst>
-          </a:prstGeom>
-          <a:solidFill>
-            <a:srgbClr val="FEF3C7"/>
-          </a:solidFill>
-          <a:ln w="12700">
-            <a:solidFill>
-              <a:srgbClr val="FEF3C7"/>
-            </a:solidFill>
-            <a:prstDash val="solid"/>
-          </a:ln>
-        </p:spPr>
-      </p:sp>
-      <p:sp>
-        <p:nvSpPr>
-          <p:cNvPr id="12" name="Text 10"/>
-          <p:cNvSpPr/>
-          <p:nvPr/>
-        </p:nvSpPr>
-        <p:spPr>
-          <a:xfrm>
-            <a:off x="1234440" y="4041648"/>
-            <a:ext cx="9144000" cy="594360"/>
-          </a:xfrm>
-          <a:prstGeom prst="rect">
-            <a:avLst/>
-          </a:prstGeom>
-          <a:noFill/>
-          <a:ln/>
-        </p:spPr>
-        <p:txBody>
-          <a:bodyPr wrap="square" rtlCol="0" anchor="ctr"/>
-          <a:lstStyle/>
-          <a:p>
-            <a:pPr algn="ctr" indent="0" marL="0">
-              <a:buNone/>
-            </a:pPr>
-            <a:r>
-              <a:rPr lang="en-US" sz="1250" b="1" dirty="0">
-                <a:solidFill>
-                  <a:srgbClr val="7A4A00"/>
-                </a:solidFill>
-                <a:latin typeface="Arial" pitchFamily="34" charset="0"/>
-                <a:ea typeface="Arial" pitchFamily="34" charset="-122"/>
-                <a:cs typeface="Arial" pitchFamily="34" charset="-120"/>
-              </a:rPr>
-              <a:t>Note: the earlier PPT was only a placeholder because the original full deck was not available to me here.</a:t>
-            </a:r>
-            <a:endParaRPr lang="en-US" sz="1250" dirty="0"/>
-          </a:p>
-          <a:p>
-            <a:pPr algn="ctr" indent="0" marL="0">
-              <a:buNone/>
-            </a:pPr>
-            <a:r>
-              <a:rPr lang="en-US" sz="1250" b="1" dirty="0">
-                <a:solidFill>
-                  <a:srgbClr val="7A4A00"/>
-                </a:solidFill>
-                <a:latin typeface="Arial" pitchFamily="34" charset="0"/>
-                <a:ea typeface="Arial" pitchFamily="34" charset="-122"/>
-                <a:cs typeface="Arial" pitchFamily="34" charset="-120"/>
-              </a:rPr>
-              <a:t>This updated deck is rebuilt around your clarified structure and matches the package you asked for.</a:t>
-            </a:r>
-            <a:endParaRPr lang="en-US" sz="1250" dirty="0"/>
-          </a:p>
-        </p:txBody>
-      </p:sp>
-      <p:sp>
-        <p:nvSpPr>
-          <p:cNvPr id="13" name="Text 11"/>
-          <p:cNvSpPr/>
-          <p:nvPr/>
-        </p:nvSpPr>
-        <p:spPr>
-          <a:xfrm>
-            <a:off x="457200" y="6492240"/>
-            <a:ext cx="9601200" cy="182880"/>
-          </a:xfrm>
-          <a:prstGeom prst="rect">
-            <a:avLst/>
-          </a:prstGeom>
-          <a:noFill/>
-          <a:ln/>
-        </p:spPr>
-        <p:txBody>
-          <a:bodyPr wrap="square" rtlCol="0" anchor="ctr"/>
-          <a:lstStyle/>
-          <a:p>
-            <a:pPr indent="0" marL="0">
-              <a:buNone/>
-            </a:pPr>
-            <a:r>
-              <a:rPr lang="en-US" sz="900" dirty="0">
-                <a:solidFill>
-                  <a:srgbClr val="6B7280"/>
-                </a:solidFill>
-                <a:latin typeface="Arial" pitchFamily="34" charset="0"/>
-                <a:ea typeface="Arial" pitchFamily="34" charset="-122"/>
-                <a:cs typeface="Arial" pitchFamily="34" charset="-120"/>
-              </a:rPr>
-              <a:t>Ready for GitHub upload as a zipped project package</a:t>
+              <a:t>Database-Server:= config file + review file + PDF report</a:t>
             </a:r>
             <a:endParaRPr lang="en-US" sz="900" dirty="0"/>
           </a:p>
@@ -4786,4 +3745,319 @@
     </a:ext>
   </a:extLst>
 </a:theme>
+</file>
+
+<file path=ppt/theme/theme2.xml><?xml version="1.0" encoding="utf-8"?>
+<a:theme xmlns:a="http://schemas.openxmlformats.org/drawingml/2006/main" name="Office Theme">
+  <a:themeElements>
+    <a:clrScheme name="Office">
+      <a:dk1>
+        <a:sysClr val="windowText" lastClr="000000"/>
+      </a:dk1>
+      <a:lt1>
+        <a:sysClr val="window" lastClr="FFFFFF"/>
+      </a:lt1>
+      <a:dk2>
+        <a:srgbClr val="0E2841"/>
+      </a:dk2>
+      <a:lt2>
+        <a:srgbClr val="E8E8E8"/>
+      </a:lt2>
+      <a:accent1>
+        <a:srgbClr val="156082"/>
+      </a:accent1>
+      <a:accent2>
+        <a:srgbClr val="E97132"/>
+      </a:accent2>
+      <a:accent3>
+        <a:srgbClr val="196B24"/>
+      </a:accent3>
+      <a:accent4>
+        <a:srgbClr val="0F9ED5"/>
+      </a:accent4>
+      <a:accent5>
+        <a:srgbClr val="A02B93"/>
+      </a:accent5>
+      <a:accent6>
+        <a:srgbClr val="4EA72E"/>
+      </a:accent6>
+      <a:hlink>
+        <a:srgbClr val="467886"/>
+      </a:hlink>
+      <a:folHlink>
+        <a:srgbClr val="96607D"/>
+      </a:folHlink>
+    </a:clrScheme>
+    <a:fontScheme name="Office">
+      <a:majorFont>
+        <a:latin typeface="Aptos Display" panose="02110004020202020204"/>
+        <a:ea typeface=""/>
+        <a:cs typeface=""/>
+        <a:font script="Jpan" typeface="游ゴシック Light"/>
+        <a:font script="Hang" typeface="맑은 고딕"/>
+        <a:font script="Hans" typeface="等线 Light"/>
+        <a:font script="Hant" typeface="新細明體"/>
+        <a:font script="Arab" typeface="Times New Roman"/>
+        <a:font script="Hebr" typeface="Times New Roman"/>
+        <a:font script="Thai" typeface="Angsana New"/>
+        <a:font script="Ethi" typeface="Nyala"/>
+        <a:font script="Beng" typeface="Vrinda"/>
+        <a:font script="Gujr" typeface="Shruti"/>
+        <a:font script="Khmr" typeface="MoolBoran"/>
+        <a:font script="Knda" typeface="Tunga"/>
+        <a:font script="Guru" typeface="Raavi"/>
+        <a:font script="Cans" typeface="Euphemia"/>
+        <a:font script="Cher" typeface="Plantagenet Cherokee"/>
+        <a:font script="Yiii" typeface="Microsoft Yi Baiti"/>
+        <a:font script="Tibt" typeface="Microsoft Himalaya"/>
+        <a:font script="Thaa" typeface="MV Boli"/>
+        <a:font script="Deva" typeface="Mangal"/>
+        <a:font script="Telu" typeface="Gautami"/>
+        <a:font script="Taml" typeface="Latha"/>
+        <a:font script="Syrc" typeface="Estrangelo Edessa"/>
+        <a:font script="Orya" typeface="Kalinga"/>
+        <a:font script="Mlym" typeface="Kartika"/>
+        <a:font script="Laoo" typeface="DokChampa"/>
+        <a:font script="Sinh" typeface="Iskoola Pota"/>
+        <a:font script="Mong" typeface="Mongolian Baiti"/>
+        <a:font script="Viet" typeface="Times New Roman"/>
+        <a:font script="Uigh" typeface="Microsoft Uighur"/>
+        <a:font script="Geor" typeface="Sylfaen"/>
+        <a:font script="Armn" typeface="Arial"/>
+        <a:font script="Bugi" typeface="Leelawadee UI"/>
+        <a:font script="Bopo" typeface="Microsoft JhengHei"/>
+        <a:font script="Java" typeface="Javanese Text"/>
+        <a:font script="Lisu" typeface="Segoe UI"/>
+        <a:font script="Mymr" typeface="Myanmar Text"/>
+        <a:font script="Nkoo" typeface="Ebrima"/>
+        <a:font script="Olck" typeface="Nirmala UI"/>
+        <a:font script="Osma" typeface="Ebrima"/>
+        <a:font script="Phag" typeface="Phagspa"/>
+        <a:font script="Syrn" typeface="Estrangelo Edessa"/>
+        <a:font script="Syrj" typeface="Estrangelo Edessa"/>
+        <a:font script="Syre" typeface="Estrangelo Edessa"/>
+        <a:font script="Sora" typeface="Nirmala UI"/>
+        <a:font script="Tale" typeface="Microsoft Tai Le"/>
+        <a:font script="Talu" typeface="Microsoft New Tai Lue"/>
+        <a:font script="Tfng" typeface="Ebrima"/>
+      </a:majorFont>
+      <a:minorFont>
+        <a:latin typeface="Aptos" panose="02110004020202020204"/>
+        <a:ea typeface=""/>
+        <a:cs typeface=""/>
+        <a:font script="Jpan" typeface="游ゴシック"/>
+        <a:font script="Hang" typeface="맑은 고딕"/>
+        <a:font script="Hans" typeface="等线"/>
+        <a:font script="Hant" typeface="新細明體"/>
+        <a:font script="Arab" typeface="Arial"/>
+        <a:font script="Hebr" typeface="Arial"/>
+        <a:font script="Thai" typeface="Cordia New"/>
+        <a:font script="Ethi" typeface="Nyala"/>
+        <a:font script="Beng" typeface="Vrinda"/>
+        <a:font script="Gujr" typeface="Shruti"/>
+        <a:font script="Khmr" typeface="DaunPenh"/>
+        <a:font script="Knda" typeface="Tunga"/>
+        <a:font script="Guru" typeface="Raavi"/>
+        <a:font script="Cans" typeface="Euphemia"/>
+        <a:font script="Cher" typeface="Plantagenet Cherokee"/>
+        <a:font script="Yiii" typeface="Microsoft Yi Baiti"/>
+        <a:font script="Tibt" typeface="Microsoft Himalaya"/>
+        <a:font script="Thaa" typeface="MV Boli"/>
+        <a:font script="Deva" typeface="Mangal"/>
+        <a:font script="Telu" typeface="Gautami"/>
+        <a:font script="Taml" typeface="Latha"/>
+        <a:font script="Syrc" typeface="Estrangelo Edessa"/>
+        <a:font script="Orya" typeface="Kalinga"/>
+        <a:font script="Mlym" typeface="Kartika"/>
+        <a:font script="Laoo" typeface="DokChampa"/>
+        <a:font script="Sinh" typeface="Iskoola Pota"/>
+        <a:font script="Mong" typeface="Mongolian Baiti"/>
+        <a:font script="Viet" typeface="Arial"/>
+        <a:font script="Uigh" typeface="Microsoft Uighur"/>
+        <a:font script="Geor" typeface="Sylfaen"/>
+        <a:font script="Armn" typeface="Arial"/>
+        <a:font script="Bugi" typeface="Leelawadee UI"/>
+        <a:font script="Bopo" typeface="Microsoft JhengHei"/>
+        <a:font script="Java" typeface="Javanese Text"/>
+        <a:font script="Lisu" typeface="Segoe UI"/>
+        <a:font script="Mymr" typeface="Myanmar Text"/>
+        <a:font script="Nkoo" typeface="Ebrima"/>
+        <a:font script="Olck" typeface="Nirmala UI"/>
+        <a:font script="Osma" typeface="Ebrima"/>
+        <a:font script="Phag" typeface="Phagspa"/>
+        <a:font script="Syrn" typeface="Estrangelo Edessa"/>
+        <a:font script="Syrj" typeface="Estrangelo Edessa"/>
+        <a:font script="Syre" typeface="Estrangelo Edessa"/>
+        <a:font script="Sora" typeface="Nirmala UI"/>
+        <a:font script="Tale" typeface="Microsoft Tai Le"/>
+        <a:font script="Talu" typeface="Microsoft New Tai Lue"/>
+        <a:font script="Tfng" typeface="Ebrima"/>
+      </a:minorFont>
+    </a:fontScheme>
+    <a:fmtScheme name="Office">
+      <a:fillStyleLst>
+        <a:solidFill>
+          <a:schemeClr val="phClr"/>
+        </a:solidFill>
+        <a:gradFill rotWithShape="1">
+          <a:gsLst>
+            <a:gs pos="0">
+              <a:schemeClr val="phClr">
+                <a:lumMod val="110000"/>
+                <a:satMod val="105000"/>
+                <a:tint val="67000"/>
+              </a:schemeClr>
+            </a:gs>
+            <a:gs pos="50000">
+              <a:schemeClr val="phClr">
+                <a:lumMod val="105000"/>
+                <a:satMod val="103000"/>
+                <a:tint val="73000"/>
+              </a:schemeClr>
+            </a:gs>
+            <a:gs pos="100000">
+              <a:schemeClr val="phClr">
+                <a:lumMod val="105000"/>
+                <a:satMod val="109000"/>
+                <a:tint val="81000"/>
+              </a:schemeClr>
+            </a:gs>
+          </a:gsLst>
+          <a:lin ang="5400000" scaled="0"/>
+        </a:gradFill>
+        <a:gradFill rotWithShape="1">
+          <a:gsLst>
+            <a:gs pos="0">
+              <a:schemeClr val="phClr">
+                <a:satMod val="103000"/>
+                <a:lumMod val="102000"/>
+                <a:tint val="94000"/>
+              </a:schemeClr>
+            </a:gs>
+            <a:gs pos="50000">
+              <a:schemeClr val="phClr">
+                <a:satMod val="110000"/>
+                <a:lumMod val="100000"/>
+                <a:shade val="100000"/>
+              </a:schemeClr>
+            </a:gs>
+            <a:gs pos="100000">
+              <a:schemeClr val="phClr">
+                <a:lumMod val="99000"/>
+                <a:satMod val="120000"/>
+                <a:shade val="78000"/>
+              </a:schemeClr>
+            </a:gs>
+          </a:gsLst>
+          <a:lin ang="5400000" scaled="0"/>
+        </a:gradFill>
+      </a:fillStyleLst>
+      <a:lnStyleLst>
+        <a:ln w="12700" cap="flat" cmpd="sng" algn="ctr">
+          <a:solidFill>
+            <a:schemeClr val="phClr"/>
+          </a:solidFill>
+          <a:prstDash val="solid"/>
+          <a:miter lim="800000"/>
+        </a:ln>
+        <a:ln w="19050" cap="flat" cmpd="sng" algn="ctr">
+          <a:solidFill>
+            <a:schemeClr val="phClr"/>
+          </a:solidFill>
+          <a:prstDash val="solid"/>
+          <a:miter lim="800000"/>
+        </a:ln>
+        <a:ln w="25400" cap="flat" cmpd="sng" algn="ctr">
+          <a:solidFill>
+            <a:schemeClr val="phClr"/>
+          </a:solidFill>
+          <a:prstDash val="solid"/>
+          <a:miter lim="800000"/>
+        </a:ln>
+      </a:lnStyleLst>
+      <a:effectStyleLst>
+        <a:effectStyle>
+          <a:effectLst/>
+        </a:effectStyle>
+        <a:effectStyle>
+          <a:effectLst/>
+        </a:effectStyle>
+        <a:effectStyle>
+          <a:effectLst>
+            <a:outerShdw blurRad="57150" dist="19050" dir="5400000" algn="ctr" rotWithShape="0">
+              <a:srgbClr val="000000">
+                <a:alpha val="63000"/>
+              </a:srgbClr>
+            </a:outerShdw>
+          </a:effectLst>
+        </a:effectStyle>
+      </a:effectStyleLst>
+      <a:bgFillStyleLst>
+        <a:solidFill>
+          <a:schemeClr val="phClr"/>
+        </a:solidFill>
+        <a:solidFill>
+          <a:schemeClr val="phClr">
+            <a:tint val="95000"/>
+            <a:satMod val="170000"/>
+          </a:schemeClr>
+        </a:solidFill>
+        <a:gradFill rotWithShape="1">
+          <a:gsLst>
+            <a:gs pos="0">
+              <a:schemeClr val="phClr">
+                <a:tint val="93000"/>
+                <a:satMod val="150000"/>
+                <a:shade val="98000"/>
+                <a:lumMod val="102000"/>
+              </a:schemeClr>
+            </a:gs>
+            <a:gs pos="50000">
+              <a:schemeClr val="phClr">
+                <a:tint val="98000"/>
+                <a:satMod val="130000"/>
+                <a:shade val="90000"/>
+                <a:lumMod val="103000"/>
+              </a:schemeClr>
+            </a:gs>
+            <a:gs pos="100000">
+              <a:schemeClr val="phClr">
+                <a:shade val="63000"/>
+                <a:satMod val="120000"/>
+              </a:schemeClr>
+            </a:gs>
+          </a:gsLst>
+          <a:lin ang="5400000" scaled="0"/>
+        </a:gradFill>
+      </a:bgFillStyleLst>
+    </a:fmtScheme>
+  </a:themeElements>
+  <a:objectDefaults>
+    <a:lnDef>
+      <a:spPr/>
+      <a:bodyPr/>
+      <a:lstStyle/>
+      <a:style>
+        <a:lnRef idx="2">
+          <a:schemeClr val="accent1"/>
+        </a:lnRef>
+        <a:fillRef idx="0">
+          <a:schemeClr val="accent1"/>
+        </a:fillRef>
+        <a:effectRef idx="1">
+          <a:schemeClr val="accent1"/>
+        </a:effectRef>
+        <a:fontRef idx="minor">
+          <a:schemeClr val="tx1"/>
+        </a:fontRef>
+      </a:style>
+    </a:lnDef>
+  </a:objectDefaults>
+  <a:extraClrSchemeLst/>
+  <a:extLst>
+    <a:ext uri="{05A4C25C-085E-4340-85A3-A5531E510DB2}">
+      <thm15:themeFamily xmlns:thm15="http://schemas.microsoft.com/office/thememl/2012/main" name="Office Theme" id="{2E142A2C-CD16-42D6-873A-C26D2A0506FA}" vid="{1BDDFF52-6CD6-40A5-AB3C-68EB2F1E4D0A}"/>
+    </a:ext>
+  </a:extLst>
+</a:theme>
 </file>